--- a/system-design-101/vi/lessons/sd-05-004/slides/sd-05-004.pptx
+++ b/system-design-101/vi/lessons/sd-05-004/slides/sd-05-004.pptx
@@ -13556,236 +13556,104 @@
           <a:ln/>
         </p:spPr>
         <p:txBody>
-          <a:bodyPr wrap="square" lIns="0" tIns="6667" rIns="0" bIns="-6667" rtlCol="0" anchor="t"/>
+          <a:bodyPr wrap="square" lIns="0" tIns="59150" rIns="0" bIns="-59150" rtlCol="0" anchor="t"/>
           <a:lstStyle/>
           <a:p>
             <a:pPr algn="l" indent="0" marL="0">
               <a:lnSpc>
-                <a:spcPts val="4200"/>
+                <a:spcPts val="7245"/>
               </a:lnSpc>
               <a:buNone/>
             </a:pPr>
             <a:r>
-              <a:rPr lang="en-US" sz="3000" dirty="0" spc="3" kern="0">
-                <a:solidFill>
-                  <a:srgbClr val="E4E1D8"/>
-                </a:solidFill>
-                <a:latin typeface="Be Vietnam Pro" pitchFamily="34" charset="0"/>
-                <a:ea typeface="Be Vietnam Pro" pitchFamily="34" charset="-122"/>
-                <a:cs typeface="Be Vietnam Pro" pitchFamily="34" charset="-120"/>
-              </a:rPr>
-              <a:t>Sơ</a:t>
-            </a:r>
-            <a:r>
-              <a:rPr lang="en-US" sz="3000" dirty="0" spc="22" kern="0">
-                <a:solidFill>
-                  <a:srgbClr val="E4E1D8"/>
-                </a:solidFill>
-                <a:latin typeface="Be Vietnam Pro" pitchFamily="34" charset="0"/>
-                <a:ea typeface="Be Vietnam Pro" pitchFamily="34" charset="-122"/>
-                <a:cs typeface="Be Vietnam Pro" pitchFamily="34" charset="-120"/>
-              </a:rPr>
-              <a:t> đồ</a:t>
-            </a:r>
-            <a:r>
-              <a:rPr lang="en-US" sz="3000" dirty="0" spc="3" kern="0">
-                <a:solidFill>
-                  <a:srgbClr val="E4E1D8"/>
-                </a:solidFill>
-                <a:latin typeface="Be Vietnam Pro" pitchFamily="34" charset="0"/>
-                <a:ea typeface="Be Vietnam Pro" pitchFamily="34" charset="-122"/>
-                <a:cs typeface="Be Vietnam Pro" pitchFamily="34" charset="-120"/>
-              </a:rPr>
-              <a:t> khối</a:t>
-            </a:r>
-            <a:r>
-              <a:rPr lang="en-US" sz="3000" dirty="0" spc="19" kern="0">
-                <a:solidFill>
-                  <a:srgbClr val="E4E1D8"/>
-                </a:solidFill>
-                <a:latin typeface="Be Vietnam Pro" pitchFamily="34" charset="0"/>
-                <a:ea typeface="Be Vietnam Pro" pitchFamily="34" charset="-122"/>
-                <a:cs typeface="Be Vietnam Pro" pitchFamily="34" charset="-120"/>
-              </a:rPr>
-              <a:t> đã</a:t>
-            </a:r>
-            <a:r>
-              <a:rPr lang="en-US" sz="3000" dirty="0" spc="-15" kern="0">
-                <a:solidFill>
-                  <a:srgbClr val="E4E1D8"/>
-                </a:solidFill>
-                <a:latin typeface="Be Vietnam Pro" pitchFamily="34" charset="0"/>
-                <a:ea typeface="Be Vietnam Pro" pitchFamily="34" charset="-122"/>
-                <a:cs typeface="Be Vietnam Pro" pitchFamily="34" charset="-120"/>
-              </a:rPr>
-              <a:t> xong,</a:t>
-            </a:r>
-            <a:r>
-              <a:rPr lang="en-US" sz="3000" dirty="0" spc="20" kern="0">
-                <a:solidFill>
-                  <a:srgbClr val="E4E1D8"/>
-                </a:solidFill>
-                <a:latin typeface="Be Vietnam Pro" pitchFamily="34" charset="0"/>
-                <a:ea typeface="Be Vietnam Pro" pitchFamily="34" charset="-122"/>
-                <a:cs typeface="Be Vietnam Pro" pitchFamily="34" charset="-120"/>
-              </a:rPr>
-              <a:t> nhưng</a:t>
-            </a:r>
-            <a:r>
-              <a:rPr lang="en-US" sz="3000" dirty="0" spc="10" kern="0">
-                <a:solidFill>
-                  <a:srgbClr val="E4E1D8"/>
-                </a:solidFill>
-                <a:latin typeface="Be Vietnam Pro" pitchFamily="34" charset="0"/>
-                <a:ea typeface="Be Vietnam Pro" pitchFamily="34" charset="-122"/>
-                <a:cs typeface="Be Vietnam Pro" pitchFamily="34" charset="-120"/>
-              </a:rPr>
-              <a:t> chưa</a:t>
-            </a:r>
-            <a:r>
-              <a:rPr lang="en-US" sz="3000" dirty="0" spc="-4" kern="0">
-                <a:solidFill>
-                  <a:srgbClr val="E4E1D8"/>
-                </a:solidFill>
-                <a:latin typeface="Be Vietnam Pro" pitchFamily="34" charset="0"/>
-                <a:ea typeface="Be Vietnam Pro" pitchFamily="34" charset="-122"/>
-                <a:cs typeface="Be Vietnam Pro" pitchFamily="34" charset="-120"/>
+              <a:rPr lang="en-US" sz="6900" dirty="0" spc="-54" kern="0">
+                <a:solidFill>
+                  <a:srgbClr val="F3EEE3"/>
+                </a:solidFill>
+                <a:latin typeface="Bricolage Grotesque ExtraBold" pitchFamily="34" charset="0"/>
+                <a:ea typeface="Bricolage Grotesque ExtraBold" pitchFamily="34" charset="-122"/>
+                <a:cs typeface="Bricolage Grotesque ExtraBold" pitchFamily="34" charset="-120"/>
+              </a:rPr>
+              <a:t>Chưa</a:t>
+            </a:r>
+            <a:r>
+              <a:rPr lang="en-US" sz="6900" dirty="0" spc="2" kern="0">
+                <a:solidFill>
+                  <a:srgbClr val="F3EEE3"/>
+                </a:solidFill>
+                <a:latin typeface="Bricolage Grotesque ExtraBold" pitchFamily="34" charset="0"/>
+                <a:ea typeface="Bricolage Grotesque ExtraBold" pitchFamily="34" charset="-122"/>
+                <a:cs typeface="Bricolage Grotesque ExtraBold" pitchFamily="34" charset="-120"/>
               </a:rPr>
               <a:t> biết</a:t>
             </a:r>
             <a:r>
-              <a:rPr lang="en-US" sz="3000" dirty="0" spc="-1" kern="0">
-                <a:solidFill>
-                  <a:srgbClr val="E4E1D8"/>
-                </a:solidFill>
-                <a:latin typeface="Be Vietnam Pro" pitchFamily="34" charset="0"/>
-                <a:ea typeface="Be Vietnam Pro" pitchFamily="34" charset="-122"/>
-                <a:cs typeface="Be Vietnam Pro" pitchFamily="34" charset="-120"/>
-              </a:rPr>
-              <a:t> bao</a:t>
-            </a:r>
-            <a:r>
-              <a:rPr lang="en-US" sz="3000" dirty="0" spc="0" kern="0">
-                <a:solidFill>
-                  <a:srgbClr val="E4E1D8"/>
-                </a:solidFill>
-                <a:latin typeface="Be Vietnam Pro" pitchFamily="34" charset="0"/>
-                <a:ea typeface="Be Vietnam Pro" pitchFamily="34" charset="-122"/>
-                <a:cs typeface="Be Vietnam Pro" pitchFamily="34" charset="-120"/>
-              </a:rPr>
-              <a:t> nhiêu</a:t>
-            </a:r>
-            <a:r>
-              <a:rPr lang="en-US" sz="3000" dirty="0" spc="10" kern="0">
-                <a:solidFill>
-                  <a:srgbClr val="E4E1D8"/>
-                </a:solidFill>
-                <a:latin typeface="Be Vietnam Pro" pitchFamily="34" charset="0"/>
-                <a:ea typeface="Be Vietnam Pro" pitchFamily="34" charset="-122"/>
-                <a:cs typeface="Be Vietnam Pro" pitchFamily="34" charset="-120"/>
-              </a:rPr>
-              <a:t> người</a:t>
-            </a:r>
-            <a:r>
-              <a:rPr lang="en-US" sz="3000" dirty="0" spc="0" kern="0">
-                <a:solidFill>
-                  <a:srgbClr val="E4E1D8"/>
-                </a:solidFill>
-                <a:latin typeface="Be Vietnam Pro" pitchFamily="34" charset="0"/>
-                <a:ea typeface="Be Vietnam Pro" pitchFamily="34" charset="-122"/>
-                <a:cs typeface="Be Vietnam Pro" pitchFamily="34" charset="-120"/>
-              </a:rPr>
-              <a:t> dùng,</a:t>
-            </a:r>
-            <a:r>
-              <a:rPr lang="en-US" sz="3000" dirty="0" spc="-1" kern="0">
-                <a:solidFill>
-                  <a:srgbClr val="E4E1D8"/>
-                </a:solidFill>
-                <a:latin typeface="Be Vietnam Pro" pitchFamily="34" charset="0"/>
-                <a:ea typeface="Be Vietnam Pro" pitchFamily="34" charset="-122"/>
-                <a:cs typeface="Be Vietnam Pro" pitchFamily="34" charset="-120"/>
-              </a:rPr>
-              <a:t> cần</a:t>
-            </a:r>
-            <a:r>
-              <a:rPr lang="en-US" sz="3000" dirty="0" spc="-2" kern="0">
-                <a:solidFill>
-                  <a:srgbClr val="E4E1D8"/>
-                </a:solidFill>
-                <a:latin typeface="Be Vietnam Pro" pitchFamily="34" charset="0"/>
-                <a:ea typeface="Be Vietnam Pro" pitchFamily="34" charset="-122"/>
-                <a:cs typeface="Be Vietnam Pro" pitchFamily="34" charset="-120"/>
-              </a:rPr>
-              <a:t> nhanh</a:t>
-            </a:r>
-            <a:r>
-              <a:rPr lang="en-US" sz="3000" dirty="0" spc="14" kern="0">
-                <a:solidFill>
-                  <a:srgbClr val="E4E1D8"/>
-                </a:solidFill>
-                <a:latin typeface="Be Vietnam Pro" pitchFamily="34" charset="0"/>
-                <a:ea typeface="Be Vietnam Pro" pitchFamily="34" charset="-122"/>
-                <a:cs typeface="Be Vietnam Pro" pitchFamily="34" charset="-120"/>
-              </a:rPr>
-              <a:t> đến</a:t>
-            </a:r>
-            <a:r>
-              <a:rPr lang="en-US" sz="3000" dirty="0" spc="10" kern="0">
-                <a:solidFill>
-                  <a:srgbClr val="E4E1D8"/>
-                </a:solidFill>
-                <a:latin typeface="Be Vietnam Pro" pitchFamily="34" charset="0"/>
-                <a:ea typeface="Be Vietnam Pro" pitchFamily="34" charset="-122"/>
-                <a:cs typeface="Be Vietnam Pro" pitchFamily="34" charset="-120"/>
-              </a:rPr>
-              <a:t> đâu.</a:t>
-            </a:r>
-            <a:r>
-              <a:rPr lang="en-US" sz="3000" dirty="0" spc="3" kern="0">
-                <a:solidFill>
-                  <a:srgbClr val="E4E1D8"/>
-                </a:solidFill>
-                <a:latin typeface="Be Vietnam Pro" pitchFamily="34" charset="0"/>
-                <a:ea typeface="Be Vietnam Pro" pitchFamily="34" charset="-122"/>
-                <a:cs typeface="Be Vietnam Pro" pitchFamily="34" charset="-120"/>
-              </a:rPr>
-              <a:t> Bỏ</a:t>
-            </a:r>
-            <a:r>
-              <a:rPr lang="en-US" sz="3000" dirty="0" spc="-14" kern="0">
-                <a:solidFill>
-                  <a:srgbClr val="E4E1D8"/>
-                </a:solidFill>
-                <a:latin typeface="Be Vietnam Pro" pitchFamily="34" charset="0"/>
-                <a:ea typeface="Be Vietnam Pro" pitchFamily="34" charset="-122"/>
-                <a:cs typeface="Be Vietnam Pro" pitchFamily="34" charset="-120"/>
+              <a:rPr lang="en-US" sz="6900" dirty="0" spc="0" kern="0">
+                <a:solidFill>
+                  <a:srgbClr val="F3EEE3"/>
+                </a:solidFill>
+                <a:latin typeface="Bricolage Grotesque ExtraBold" pitchFamily="34" charset="0"/>
+                <a:ea typeface="Bricolage Grotesque ExtraBold" pitchFamily="34" charset="-122"/>
+                <a:cs typeface="Bricolage Grotesque ExtraBold" pitchFamily="34" charset="-120"/>
+              </a:rPr>
+              <a:t> quy</a:t>
+            </a:r>
+            <a:r>
+              <a:rPr lang="en-US" sz="6900" dirty="0" spc="-5" kern="0">
+                <a:solidFill>
+                  <a:srgbClr val="F3EEE3"/>
+                </a:solidFill>
+                <a:latin typeface="Bricolage Grotesque ExtraBold" pitchFamily="34" charset="0"/>
+                <a:ea typeface="Bricolage Grotesque ExtraBold" pitchFamily="34" charset="-122"/>
+                <a:cs typeface="Bricolage Grotesque ExtraBold" pitchFamily="34" charset="-120"/>
+              </a:rPr>
+              <a:t> mô:</a:t>
+            </a:r>
+            <a:r>
+              <a:rPr lang="en-US" sz="6900" dirty="0" spc="1" kern="0">
+                <a:solidFill>
+                  <a:srgbClr val="F3EEE3"/>
+                </a:solidFill>
+                <a:latin typeface="Bricolage Grotesque ExtraBold" pitchFamily="34" charset="0"/>
+                <a:ea typeface="Bricolage Grotesque ExtraBold" pitchFamily="34" charset="-122"/>
+                <a:cs typeface="Bricolage Grotesque ExtraBold" pitchFamily="34" charset="-120"/>
+              </a:rPr>
+              <a:t> bỏ</a:t>
+            </a:r>
+            <a:r>
+              <a:rPr lang="en-US" sz="6900" dirty="0" spc="-9" kern="0">
+                <a:solidFill>
+                  <a:srgbClr val="F3EEE3"/>
+                </a:solidFill>
+                <a:latin typeface="Bricolage Grotesque ExtraBold" pitchFamily="34" charset="0"/>
+                <a:ea typeface="Bricolage Grotesque ExtraBold" pitchFamily="34" charset="-122"/>
+                <a:cs typeface="Bricolage Grotesque ExtraBold" pitchFamily="34" charset="-120"/>
               </a:rPr>
               <a:t> sót</a:t>
             </a:r>
             <a:r>
-              <a:rPr lang="en-US" sz="3000" dirty="0" spc="13" kern="0">
-                <a:solidFill>
-                  <a:srgbClr val="E4E1D8"/>
-                </a:solidFill>
-                <a:latin typeface="Be Vietnam Pro" pitchFamily="34" charset="0"/>
-                <a:ea typeface="Be Vietnam Pro" pitchFamily="34" charset="-122"/>
-                <a:cs typeface="Be Vietnam Pro" pitchFamily="34" charset="-120"/>
+              <a:rPr lang="en-US" sz="6900" dirty="0" spc="-95" kern="0">
+                <a:solidFill>
+                  <a:srgbClr val="F3EEE3"/>
+                </a:solidFill>
+                <a:latin typeface="Bricolage Grotesque ExtraBold" pitchFamily="34" charset="0"/>
+                <a:ea typeface="Bricolage Grotesque ExtraBold" pitchFamily="34" charset="-122"/>
+                <a:cs typeface="Bricolage Grotesque ExtraBold" pitchFamily="34" charset="-120"/>
               </a:rPr>
               <a:t> bước</a:t>
             </a:r>
             <a:r>
-              <a:rPr lang="en-US" sz="3000" dirty="0" spc="-3" kern="0">
-                <a:solidFill>
-                  <a:srgbClr val="E4E1D8"/>
-                </a:solidFill>
-                <a:latin typeface="Be Vietnam Pro" pitchFamily="34" charset="0"/>
-                <a:ea typeface="Be Vietnam Pro" pitchFamily="34" charset="-122"/>
-                <a:cs typeface="Be Vietnam Pro" pitchFamily="34" charset="-120"/>
+              <a:rPr lang="en-US" sz="6900" dirty="0" spc="-39" kern="0">
+                <a:solidFill>
+                  <a:srgbClr val="F3EEE3"/>
+                </a:solidFill>
+                <a:latin typeface="Bricolage Grotesque ExtraBold" pitchFamily="34" charset="0"/>
+                <a:ea typeface="Bricolage Grotesque ExtraBold" pitchFamily="34" charset="-122"/>
+                <a:cs typeface="Bricolage Grotesque ExtraBold" pitchFamily="34" charset="-120"/>
               </a:rPr>
               <a:t> nào?</a:t>
             </a:r>
-            <a:endParaRPr lang="en-US" sz="3000" dirty="0"/>
+            <a:endParaRPr lang="en-US" sz="6900" dirty="0"/>
           </a:p>
         </p:txBody>
       </p:sp>
@@ -14761,6 +14629,17 @@
               <a:t>Chưa</a:t>
             </a:r>
             <a:r>
+              <a:rPr lang="en-US" sz="2700" dirty="0" spc="-2" kern="0">
+                <a:solidFill>
+                  <a:srgbClr val="E4E1D8"/>
+                </a:solidFill>
+                <a:latin typeface="Be Vietnam Pro" pitchFamily="34" charset="0"/>
+                <a:ea typeface="Be Vietnam Pro" pitchFamily="34" charset="-122"/>
+                <a:cs typeface="Be Vietnam Pro" pitchFamily="34" charset="-120"/>
+              </a:rPr>
+              <a:t> đủ</a:t>
+            </a:r>
+            <a:r>
               <a:rPr lang="en-US" sz="2700" dirty="0" spc="0" kern="0">
                 <a:solidFill>
                   <a:srgbClr val="E4E1D8"/>
@@ -14769,7 +14648,18 @@
                 <a:ea typeface="Be Vietnam Pro" pitchFamily="34" charset="-122"/>
                 <a:cs typeface="Be Vietnam Pro" pitchFamily="34" charset="-120"/>
               </a:rPr>
-              <a:t> có căn</a:t>
+              <a:t> căn</a:t>
+            </a:r>
+            <a:r>
+              <a:rPr lang="en-US" sz="2700" dirty="0" spc="-2" kern="0">
+                <a:solidFill>
+                  <a:srgbClr val="E4E1D8"/>
+                </a:solidFill>
+                <a:latin typeface="Be Vietnam Pro" pitchFamily="34" charset="0"/>
+                <a:ea typeface="Be Vietnam Pro" pitchFamily="34" charset="-122"/>
+                <a:cs typeface="Be Vietnam Pro" pitchFamily="34" charset="-120"/>
+              </a:rPr>
+              <a:t> cứ</a:t>
             </a:r>
             <a:r>
               <a:rPr lang="en-US" sz="2700" dirty="0" spc="-1" kern="0">
@@ -14780,10 +14670,10 @@
                 <a:ea typeface="Be Vietnam Pro" pitchFamily="34" charset="-122"/>
                 <a:cs typeface="Be Vietnam Pro" pitchFamily="34" charset="-120"/>
               </a:rPr>
-              <a:t> cứ</a:t>
-            </a:r>
-            <a:r>
-              <a:rPr lang="en-US" sz="2700" dirty="0" spc="14" kern="0">
+              <a:t> chọn cơ</a:t>
+            </a:r>
+            <a:r>
+              <a:rPr lang="en-US" sz="2700" dirty="0" spc="-12" kern="0">
                 <a:solidFill>
                   <a:srgbClr val="E4E1D8"/>
                 </a:solidFill>
@@ -14791,7 +14681,18 @@
                 <a:ea typeface="Be Vietnam Pro" pitchFamily="34" charset="-122"/>
                 <a:cs typeface="Be Vietnam Pro" pitchFamily="34" charset="-120"/>
               </a:rPr>
-              <a:t> để</a:t>
+              <a:t> sở</a:t>
+            </a:r>
+            <a:r>
+              <a:rPr lang="en-US" sz="2700" dirty="0" spc="-3" kern="0">
+                <a:solidFill>
+                  <a:srgbClr val="E4E1D8"/>
+                </a:solidFill>
+                <a:latin typeface="Be Vietnam Pro" pitchFamily="34" charset="0"/>
+                <a:ea typeface="Be Vietnam Pro" pitchFamily="34" charset="-122"/>
+                <a:cs typeface="Be Vietnam Pro" pitchFamily="34" charset="-120"/>
+              </a:rPr>
+              <a:t> dữ</a:t>
             </a:r>
             <a:r>
               <a:rPr lang="en-US" sz="2700" dirty="0" spc="-1" kern="0">
@@ -14802,10 +14703,10 @@
                 <a:ea typeface="Be Vietnam Pro" pitchFamily="34" charset="-122"/>
                 <a:cs typeface="Be Vietnam Pro" pitchFamily="34" charset="-120"/>
               </a:rPr>
-              <a:t> chọn</a:t>
-            </a:r>
-            <a:r>
-              <a:rPr lang="en-US" sz="2700" dirty="0" spc="0" kern="0">
+              <a:t> liệu</a:t>
+            </a:r>
+            <a:r>
+              <a:rPr lang="en-US" sz="2700" dirty="0" spc="-13" kern="0">
                 <a:solidFill>
                   <a:srgbClr val="E4E1D8"/>
                 </a:solidFill>
@@ -14813,10 +14714,10 @@
                 <a:ea typeface="Be Vietnam Pro" pitchFamily="34" charset="-122"/>
                 <a:cs typeface="Be Vietnam Pro" pitchFamily="34" charset="-120"/>
               </a:rPr>
-              <a:t> cơ</a:t>
-            </a:r>
-            <a:r>
-              <a:rPr lang="en-US" sz="2700" dirty="0" spc="-13" kern="0">
+              <a:t> hay</a:t>
+            </a:r>
+            <a:r>
+              <a:rPr lang="en-US" sz="2700" dirty="0" spc="1" kern="0">
                 <a:solidFill>
                   <a:srgbClr val="E4E1D8"/>
                 </a:solidFill>
@@ -14824,84 +14725,7 @@
                 <a:ea typeface="Be Vietnam Pro" pitchFamily="34" charset="-122"/>
                 <a:cs typeface="Be Vietnam Pro" pitchFamily="34" charset="-120"/>
               </a:rPr>
-              <a:t> sở</a:t>
-            </a:r>
-            <a:r>
-              <a:rPr lang="en-US" sz="2700" dirty="0" spc="-3" kern="0">
-                <a:solidFill>
-                  <a:srgbClr val="E4E1D8"/>
-                </a:solidFill>
-                <a:latin typeface="Be Vietnam Pro" pitchFamily="34" charset="0"/>
-                <a:ea typeface="Be Vietnam Pro" pitchFamily="34" charset="-122"/>
-                <a:cs typeface="Be Vietnam Pro" pitchFamily="34" charset="-120"/>
-              </a:rPr>
-              <a:t> dữ</a:t>
-            </a:r>
-            <a:r>
-              <a:rPr lang="en-US" sz="2700" dirty="0" spc="0" kern="0">
-                <a:solidFill>
-                  <a:srgbClr val="E4E1D8"/>
-                </a:solidFill>
-                <a:latin typeface="Be Vietnam Pro" pitchFamily="34" charset="0"/>
-                <a:ea typeface="Be Vietnam Pro" pitchFamily="34" charset="-122"/>
-                <a:cs typeface="Be Vietnam Pro" pitchFamily="34" charset="-120"/>
-              </a:rPr>
-              <a:t> liệu,</a:t>
-            </a:r>
-            <a:r>
-              <a:rPr lang="en-US" sz="2700" dirty="0" spc="1" kern="0">
-                <a:solidFill>
-                  <a:srgbClr val="E4E1D8"/>
-                </a:solidFill>
-                <a:latin typeface="Be Vietnam Pro" pitchFamily="34" charset="0"/>
-                <a:ea typeface="Be Vietnam Pro" pitchFamily="34" charset="-122"/>
-                <a:cs typeface="Be Vietnam Pro" pitchFamily="34" charset="-120"/>
-              </a:rPr>
-              <a:t> cache</a:t>
-            </a:r>
-            <a:r>
-              <a:rPr lang="en-US" sz="2700" dirty="0" spc="-13" kern="0">
-                <a:solidFill>
-                  <a:srgbClr val="E4E1D8"/>
-                </a:solidFill>
-                <a:latin typeface="Be Vietnam Pro" pitchFamily="34" charset="0"/>
-                <a:ea typeface="Be Vietnam Pro" pitchFamily="34" charset="-122"/>
-                <a:cs typeface="Be Vietnam Pro" pitchFamily="34" charset="-120"/>
-              </a:rPr>
-              <a:t> hay</a:t>
-            </a:r>
-            <a:r>
-              <a:rPr lang="en-US" sz="2700" dirty="0" spc="2" kern="0">
-                <a:solidFill>
-                  <a:srgbClr val="E4E1D8"/>
-                </a:solidFill>
-                <a:latin typeface="Be Vietnam Pro" pitchFamily="34" charset="0"/>
-                <a:ea typeface="Be Vietnam Pro" pitchFamily="34" charset="-122"/>
-                <a:cs typeface="Be Vietnam Pro" pitchFamily="34" charset="-120"/>
-              </a:rPr>
-              <a:t> cách</a:t>
-            </a:r>
-            <a:r>
-              <a:rPr lang="en-US" sz="2700" dirty="0" spc="-1" kern="0">
-                <a:solidFill>
-                  <a:srgbClr val="E4E1D8"/>
-                </a:solidFill>
-                <a:latin typeface="Be Vietnam Pro" pitchFamily="34" charset="0"/>
-                <a:ea typeface="Be Vietnam Pro" pitchFamily="34" charset="-122"/>
-                <a:cs typeface="Be Vietnam Pro" pitchFamily="34" charset="-120"/>
-              </a:rPr>
-              <a:t> chia</a:t>
-            </a:r>
-            <a:r>
-              <a:rPr lang="en-US" sz="2700" dirty="0" spc="-3" kern="0">
-                <a:solidFill>
-                  <a:srgbClr val="E4E1D8"/>
-                </a:solidFill>
-                <a:latin typeface="Be Vietnam Pro" pitchFamily="34" charset="0"/>
-                <a:ea typeface="Be Vietnam Pro" pitchFamily="34" charset="-122"/>
-                <a:cs typeface="Be Vietnam Pro" pitchFamily="34" charset="-120"/>
-              </a:rPr>
-              <a:t> nhỏ.</a:t>
+              <a:t> cache.</a:t>
             </a:r>
             <a:endParaRPr lang="en-US" sz="2700" dirty="0"/>
           </a:p>

--- a/system-design-101/vi/lessons/sd-05-004/slides/sd-05-004.pptx
+++ b/system-design-101/vi/lessons/sd-05-004/slides/sd-05-004.pptx
@@ -1947,7 +1947,7 @@
               <a:buNone/>
             </a:pPr>
             <a:r>
-              <a:rPr lang="en-US" sz="3000" dirty="0" spc="-10" kern="0">
+              <a:rPr lang="en-US" sz="3000" dirty="0" spc="1" kern="0">
                 <a:solidFill>
                   <a:srgbClr val="E4E1D8"/>
                 </a:solidFill>
@@ -1955,7 +1955,18 @@
                 <a:ea typeface="Be Vietnam Pro" pitchFamily="34" charset="-122"/>
                 <a:cs typeface="Be Vietnam Pro" pitchFamily="34" charset="-120"/>
               </a:rPr>
-              <a:t>Một</a:t>
+              <a:t>Thiếu</a:t>
+            </a:r>
+            <a:r>
+              <a:rPr lang="en-US" sz="3000" dirty="0" spc="12" kern="0">
+                <a:solidFill>
+                  <a:srgbClr val="E4E1D8"/>
+                </a:solidFill>
+                <a:latin typeface="Be Vietnam Pro" pitchFamily="34" charset="0"/>
+                <a:ea typeface="Be Vietnam Pro" pitchFamily="34" charset="-122"/>
+                <a:cs typeface="Be Vietnam Pro" pitchFamily="34" charset="-120"/>
+              </a:rPr>
+              <a:t> bước</a:t>
             </a:r>
             <a:r>
               <a:rPr lang="en-US" sz="3000" dirty="0" spc="-1" kern="0">
@@ -1966,10 +1977,10 @@
                 <a:ea typeface="Be Vietnam Pro" pitchFamily="34" charset="-122"/>
                 <a:cs typeface="Be Vietnam Pro" pitchFamily="34" charset="-120"/>
               </a:rPr>
-              <a:t> cuộc</a:t>
-            </a:r>
-            <a:r>
-              <a:rPr lang="en-US" sz="3000" dirty="0" spc="-29" kern="0">
+              <a:t> nào</a:t>
+            </a:r>
+            <a:r>
+              <a:rPr lang="en-US" sz="3000" dirty="0" spc="0" kern="0">
                 <a:solidFill>
                   <a:srgbClr val="E4E1D8"/>
                 </a:solidFill>
@@ -1977,10 +1988,10 @@
                 <a:ea typeface="Be Vietnam Pro" pitchFamily="34" charset="-122"/>
                 <a:cs typeface="Be Vietnam Pro" pitchFamily="34" charset="-120"/>
               </a:rPr>
-              <a:t> trò</a:t>
-            </a:r>
-            <a:r>
-              <a:rPr lang="en-US" sz="3000" dirty="0" spc="-16" kern="0">
+              <a:t> thì</a:t>
+            </a:r>
+            <a:r>
+              <a:rPr lang="en-US" sz="3000" dirty="0" spc="-5" kern="0">
                 <a:solidFill>
                   <a:srgbClr val="E4E1D8"/>
                 </a:solidFill>
@@ -1988,10 +1999,10 @@
                 <a:ea typeface="Be Vietnam Pro" pitchFamily="34" charset="-122"/>
                 <a:cs typeface="Be Vietnam Pro" pitchFamily="34" charset="-120"/>
               </a:rPr>
-              <a:t> chuyện về</a:t>
-            </a:r>
-            <a:r>
-              <a:rPr lang="en-US" sz="3000" dirty="0" spc="10" kern="0">
+              <a:t> thiết</a:t>
+            </a:r>
+            <a:r>
+              <a:rPr lang="en-US" sz="3000" dirty="0" spc="-42" kern="0">
                 <a:solidFill>
                   <a:srgbClr val="E4E1D8"/>
                 </a:solidFill>
@@ -1999,10 +2010,10 @@
                 <a:ea typeface="Be Vietnam Pro" pitchFamily="34" charset="-122"/>
                 <a:cs typeface="Be Vietnam Pro" pitchFamily="34" charset="-120"/>
               </a:rPr>
-              <a:t> đánh</a:t>
-            </a:r>
-            <a:r>
-              <a:rPr lang="en-US" sz="3000" dirty="0" spc="13" kern="0">
+              <a:t> kế</a:t>
+            </a:r>
+            <a:r>
+              <a:rPr lang="en-US" sz="3000" dirty="0" spc="-15" kern="0">
                 <a:solidFill>
                   <a:srgbClr val="E4E1D8"/>
                 </a:solidFill>
@@ -2010,10 +2021,10 @@
                 <a:ea typeface="Be Vietnam Pro" pitchFamily="34" charset="-122"/>
                 <a:cs typeface="Be Vietnam Pro" pitchFamily="34" charset="-120"/>
               </a:rPr>
-              <a:t> đổi,</a:t>
-            </a:r>
-            <a:r>
-              <a:rPr lang="en-US" sz="3000" dirty="0" spc="2" kern="0">
+              <a:t> mất</a:t>
+            </a:r>
+            <a:r>
+              <a:rPr lang="en-US" sz="3000" dirty="0" spc="-1" kern="0">
                 <a:solidFill>
                   <a:srgbClr val="E4E1D8"/>
                 </a:solidFill>
@@ -2021,10 +2032,10 @@
                 <a:ea typeface="Be Vietnam Pro" pitchFamily="34" charset="-122"/>
                 <a:cs typeface="Be Vietnam Pro" pitchFamily="34" charset="-120"/>
               </a:rPr>
-              <a:t> không</a:t>
-            </a:r>
-            <a:r>
-              <a:rPr lang="en-US" sz="3000" dirty="0" spc="1" kern="0">
+              <a:t> căn</a:t>
+            </a:r>
+            <a:r>
+              <a:rPr lang="en-US" sz="3000" dirty="0" spc="74" kern="0">
                 <a:solidFill>
                   <a:srgbClr val="E4E1D8"/>
                 </a:solidFill>
@@ -2032,29 +2043,7 @@
                 <a:ea typeface="Be Vietnam Pro" pitchFamily="34" charset="-122"/>
                 <a:cs typeface="Be Vietnam Pro" pitchFamily="34" charset="-120"/>
               </a:rPr>
-              <a:t> phải</a:t>
-            </a:r>
-            <a:r>
-              <a:rPr lang="en-US" sz="3000" dirty="0" spc="-1" kern="0">
-                <a:solidFill>
-                  <a:srgbClr val="E4E1D8"/>
-                </a:solidFill>
-                <a:latin typeface="Be Vietnam Pro" pitchFamily="34" charset="0"/>
-                <a:ea typeface="Be Vietnam Pro" pitchFamily="34" charset="-122"/>
-                <a:cs typeface="Be Vietnam Pro" pitchFamily="34" charset="-120"/>
-              </a:rPr>
-              <a:t> bài</a:t>
-            </a:r>
-            <a:r>
-              <a:rPr lang="en-US" sz="3000" dirty="0" spc="0" kern="0">
-                <a:solidFill>
-                  <a:srgbClr val="E4E1D8"/>
-                </a:solidFill>
-                <a:latin typeface="Be Vietnam Pro" pitchFamily="34" charset="0"/>
-                <a:ea typeface="Be Vietnam Pro" pitchFamily="34" charset="-122"/>
-                <a:cs typeface="Be Vietnam Pro" pitchFamily="34" charset="-120"/>
-              </a:rPr>
-              <a:t> thi.</a:t>
+              <a:t> cứ?</a:t>
             </a:r>
             <a:endParaRPr lang="en-US" sz="3000" dirty="0"/>
           </a:p>
@@ -3050,7 +3039,7 @@
               <a:t> thứ tự</a:t>
             </a:r>
             <a:r>
-              <a:rPr lang="en-US" sz="2100" dirty="0" spc="-3" kern="0">
+              <a:rPr lang="en-US" sz="2100" dirty="0" spc="10" kern="0">
                 <a:solidFill>
                   <a:srgbClr val="9AA0B5"/>
                 </a:solidFill>
@@ -3058,10 +3047,10 @@
                 <a:ea typeface="Be Vietnam Pro" pitchFamily="34" charset="-122"/>
                 <a:cs typeface="Be Vietnam Pro" pitchFamily="34" charset="-120"/>
               </a:rPr>
-              <a:t> có</a:t>
-            </a:r>
-            <a:r>
-              <a:rPr lang="en-US" sz="2100" dirty="0" spc="-1" kern="0">
+              <a:t> đổi</a:t>
+            </a:r>
+            <a:r>
+              <a:rPr lang="en-US" sz="2100" dirty="0" spc="4" kern="0">
                 <a:solidFill>
                   <a:srgbClr val="9AA0B5"/>
                 </a:solidFill>
@@ -3069,18 +3058,7 @@
                 <a:ea typeface="Be Vietnam Pro" pitchFamily="34" charset="-122"/>
                 <a:cs typeface="Be Vietnam Pro" pitchFamily="34" charset="-120"/>
               </a:rPr>
-              <a:t> thể</a:t>
-            </a:r>
-            <a:r>
-              <a:rPr lang="en-US" sz="2100" dirty="0" spc="10" kern="0">
-                <a:solidFill>
-                  <a:srgbClr val="9AA0B5"/>
-                </a:solidFill>
-                <a:latin typeface="Be Vietnam Pro" pitchFamily="34" charset="0"/>
-                <a:ea typeface="Be Vietnam Pro" pitchFamily="34" charset="-122"/>
-                <a:cs typeface="Be Vietnam Pro" pitchFamily="34" charset="-120"/>
-              </a:rPr>
-              <a:t> đổi</a:t>
+              <a:t> được</a:t>
             </a:r>
             <a:endParaRPr lang="en-US" sz="2100" dirty="0"/>
           </a:p>
@@ -3564,7 +3542,7 @@
               <a:buNone/>
             </a:pPr>
             <a:r>
-              <a:rPr lang="en-US" sz="2400" dirty="0" spc="2" kern="0">
+              <a:rPr lang="en-US" sz="2400" dirty="0" spc="-2" kern="0">
                 <a:solidFill>
                   <a:srgbClr val="E4E1D8"/>
                 </a:solidFill>
@@ -3572,10 +3550,10 @@
                 <a:ea typeface="Be Vietnam Pro" pitchFamily="34" charset="-122"/>
                 <a:cs typeface="Be Vietnam Pro" pitchFamily="34" charset="-120"/>
               </a:rPr>
-              <a:t>Giao</a:t>
-            </a:r>
-            <a:r>
-              <a:rPr lang="en-US" sz="2400" dirty="0" spc="0" kern="0">
+              <a:t>Quy</a:t>
+            </a:r>
+            <a:r>
+              <a:rPr lang="en-US" sz="2400" dirty="0" spc="8" kern="0">
                 <a:solidFill>
                   <a:srgbClr val="E4E1D8"/>
                 </a:solidFill>
@@ -3583,76 +3561,10 @@
                 <a:ea typeface="Be Vietnam Pro" pitchFamily="34" charset="-122"/>
                 <a:cs typeface="Be Vietnam Pro" pitchFamily="34" charset="-120"/>
               </a:rPr>
-              <a:t> diện</a:t>
-            </a:r>
-            <a:r>
-              <a:rPr lang="en-US" sz="2400" dirty="0" spc="2" kern="0">
-                <a:solidFill>
-                  <a:srgbClr val="E4E1D8"/>
-                </a:solidFill>
-                <a:latin typeface="Be Vietnam Pro" pitchFamily="34" charset="0"/>
-                <a:ea typeface="Be Vietnam Pro" pitchFamily="34" charset="-122"/>
-                <a:cs typeface="Be Vietnam Pro" pitchFamily="34" charset="-120"/>
-              </a:rPr>
-              <a:t> lập</a:t>
-            </a:r>
-            <a:r>
-              <a:rPr lang="en-US" sz="2400" dirty="0" spc="9" kern="0">
-                <a:solidFill>
-                  <a:srgbClr val="E4E1D8"/>
-                </a:solidFill>
-                <a:latin typeface="Be Vietnam Pro" pitchFamily="34" charset="0"/>
-                <a:ea typeface="Be Vietnam Pro" pitchFamily="34" charset="-122"/>
-                <a:cs typeface="Be Vietnam Pro" pitchFamily="34" charset="-120"/>
-              </a:rPr>
-              <a:t> trình</a:t>
-            </a:r>
-            <a:r>
-              <a:rPr lang="en-US" sz="2400" dirty="0" spc="27" kern="0">
-                <a:solidFill>
-                  <a:srgbClr val="E4E1D8"/>
-                </a:solidFill>
-                <a:latin typeface="Be Vietnam Pro" pitchFamily="34" charset="0"/>
-                <a:ea typeface="Be Vietnam Pro" pitchFamily="34" charset="-122"/>
-                <a:cs typeface="Be Vietnam Pro" pitchFamily="34" charset="-120"/>
-              </a:rPr>
-              <a:t> ứng</a:t>
-            </a:r>
-            <a:r>
-              <a:rPr lang="en-US" sz="2400" dirty="0" spc="3" kern="0">
-                <a:solidFill>
-                  <a:srgbClr val="E4E1D8"/>
-                </a:solidFill>
-                <a:latin typeface="Be Vietnam Pro" pitchFamily="34" charset="0"/>
-                <a:ea typeface="Be Vietnam Pro" pitchFamily="34" charset="-122"/>
-                <a:cs typeface="Be Vietnam Pro" pitchFamily="34" charset="-120"/>
-              </a:rPr>
-              <a:t> dụng:</a:t>
-            </a:r>
-            <a:r>
-              <a:rPr lang="en-US" sz="2400" dirty="0" spc="0" kern="0">
-                <a:solidFill>
-                  <a:srgbClr val="E4E1D8"/>
-                </a:solidFill>
-                <a:latin typeface="Be Vietnam Pro" pitchFamily="34" charset="0"/>
-                <a:ea typeface="Be Vietnam Pro" pitchFamily="34" charset="-122"/>
-                <a:cs typeface="Be Vietnam Pro" pitchFamily="34" charset="-120"/>
-              </a:rPr>
-              <a:t> quy</a:t>
-            </a:r>
-            <a:r>
-              <a:rPr lang="en-US" sz="2400" dirty="0" spc="7" kern="0">
-                <a:solidFill>
-                  <a:srgbClr val="E4E1D8"/>
-                </a:solidFill>
-                <a:latin typeface="Be Vietnam Pro" pitchFamily="34" charset="0"/>
-                <a:ea typeface="Be Vietnam Pro" pitchFamily="34" charset="-122"/>
-                <a:cs typeface="Be Vietnam Pro" pitchFamily="34" charset="-120"/>
-              </a:rPr>
               <a:t> ước</a:t>
             </a:r>
             <a:r>
-              <a:rPr lang="en-US" sz="2400" dirty="0" spc="17" kern="0">
+              <a:rPr lang="en-US" sz="2400" dirty="0" spc="16" kern="0">
                 <a:solidFill>
                   <a:srgbClr val="E4E1D8"/>
                 </a:solidFill>
@@ -3981,7 +3893,7 @@
               <a:t> để</a:t>
             </a:r>
             <a:r>
-              <a:rPr lang="en-US" sz="2400" dirty="0" spc="-17" kern="0">
+              <a:rPr lang="en-US" sz="2400" dirty="0" spc="2" kern="0">
                 <a:solidFill>
                   <a:srgbClr val="E4E1D8"/>
                 </a:solidFill>
@@ -3989,10 +3901,10 @@
                 <a:ea typeface="Be Vietnam Pro" pitchFamily="34" charset="-122"/>
                 <a:cs typeface="Be Vietnam Pro" pitchFamily="34" charset="-120"/>
               </a:rPr>
-              <a:t> về</a:t>
-            </a:r>
-            <a:r>
-              <a:rPr lang="en-US" sz="2400" dirty="0" spc="-7" kern="0">
+              <a:t> tìm,</a:t>
+            </a:r>
+            <a:r>
+              <a:rPr lang="en-US" sz="2400" dirty="0" spc="8" kern="0">
                 <a:solidFill>
                   <a:srgbClr val="E4E1D8"/>
                 </a:solidFill>
@@ -4000,51 +3912,7 @@
                 <a:ea typeface="Be Vietnam Pro" pitchFamily="34" charset="-122"/>
                 <a:cs typeface="Be Vietnam Pro" pitchFamily="34" charset="-120"/>
               </a:rPr>
-              <a:t> sau</a:t>
-            </a:r>
-            <a:r>
-              <a:rPr lang="en-US" sz="2400" dirty="0" spc="2" kern="0">
-                <a:solidFill>
-                  <a:srgbClr val="E4E1D8"/>
-                </a:solidFill>
-                <a:latin typeface="Be Vietnam Pro" pitchFamily="34" charset="0"/>
-                <a:ea typeface="Be Vietnam Pro" pitchFamily="34" charset="-122"/>
-                <a:cs typeface="Be Vietnam Pro" pitchFamily="34" charset="-120"/>
-              </a:rPr>
-              <a:t> tìm</a:t>
-            </a:r>
-            <a:r>
-              <a:rPr lang="en-US" sz="2400" dirty="0" spc="-15" kern="0">
-                <a:solidFill>
-                  <a:srgbClr val="E4E1D8"/>
-                </a:solidFill>
-                <a:latin typeface="Be Vietnam Pro" pitchFamily="34" charset="0"/>
-                <a:ea typeface="Be Vietnam Pro" pitchFamily="34" charset="-122"/>
-                <a:cs typeface="Be Vietnam Pro" pitchFamily="34" charset="-120"/>
-              </a:rPr>
-              <a:t> và</a:t>
-            </a:r>
-            <a:r>
-              <a:rPr lang="en-US" sz="2400" dirty="0" spc="1" kern="0">
-                <a:solidFill>
-                  <a:srgbClr val="E4E1D8"/>
-                </a:solidFill>
-                <a:latin typeface="Be Vietnam Pro" pitchFamily="34" charset="0"/>
-                <a:ea typeface="Be Vietnam Pro" pitchFamily="34" charset="-122"/>
-                <a:cs typeface="Be Vietnam Pro" pitchFamily="34" charset="-120"/>
-              </a:rPr>
-              <a:t> cập</a:t>
-            </a:r>
-            <a:r>
-              <a:rPr lang="en-US" sz="2400" dirty="0" spc="-7" kern="0">
-                <a:solidFill>
-                  <a:srgbClr val="E4E1D8"/>
-                </a:solidFill>
-                <a:latin typeface="Be Vietnam Pro" pitchFamily="34" charset="0"/>
-                <a:ea typeface="Be Vietnam Pro" pitchFamily="34" charset="-122"/>
-                <a:cs typeface="Be Vietnam Pro" pitchFamily="34" charset="-120"/>
-              </a:rPr>
-              <a:t> nhật.</a:t>
+              <a:t> sửa.</a:t>
             </a:r>
             <a:endParaRPr lang="en-US" sz="2400" dirty="0"/>
           </a:p>
@@ -4124,7 +3992,7 @@
       </p:sp>
       <p:sp>
         <p:nvSpPr>
-          <p:cNvPr id="12" name="Text richtext-1792370309386-40797472"/>
+          <p:cNvPr id="12" name="Text 10"/>
           <p:cNvSpPr/>
           <p:nvPr/>
         </p:nvSpPr>
@@ -4143,19 +4011,14 @@
           <a:bodyPr wrap="square" lIns="0" tIns="5001" rIns="0" bIns="-5001" rtlCol="0" anchor="t"/>
           <a:lstStyle/>
           <a:p>
-            <a:pPr algn="l" marL="285750" indent="-204151">
+            <a:pPr algn="l" indent="0" marL="0">
               <a:lnSpc>
                 <a:spcPts val="3150"/>
               </a:lnSpc>
-              <a:spcAft>
-                <a:spcPts val="1050"/>
-              </a:spcAft>
-              <a:buSzPct val="100000"/>
-              <a:buFont typeface="Arial"/>
-              <a:buChar char="•"/>
+              <a:buNone/>
             </a:pPr>
             <a:r>
-              <a:rPr lang="en-US" sz="2250" dirty="0" spc="-5" kern="0">
+              <a:rPr lang="en-US" sz="2250" dirty="0" spc="-16" kern="0">
                 <a:solidFill>
                   <a:srgbClr val="E4E1D8"/>
                 </a:solidFill>
@@ -4163,10 +4026,10 @@
                 <a:ea typeface="Be Vietnam Pro" pitchFamily="34" charset="-122"/>
                 <a:cs typeface="Be Vietnam Pro" pitchFamily="34" charset="-120"/>
               </a:rPr>
-              <a:t>ByteByteGo,</a:t>
-            </a:r>
-            <a:r>
-              <a:rPr lang="en-US" sz="2250" dirty="0" spc="-3" kern="0">
+              <a:t>System</a:t>
+            </a:r>
+            <a:r>
+              <a:rPr lang="en-US" sz="2250" dirty="0" spc="0" kern="0">
                 <a:solidFill>
                   <a:srgbClr val="E4E1D8"/>
                 </a:solidFill>
@@ -4174,7 +4037,18 @@
                 <a:ea typeface="Be Vietnam Pro" pitchFamily="34" charset="-122"/>
                 <a:cs typeface="Be Vietnam Pro" pitchFamily="34" charset="-120"/>
               </a:rPr>
-              <a:t> bài</a:t>
+              <a:t> Design</a:t>
+            </a:r>
+            <a:r>
+              <a:rPr lang="en-US" sz="2250" dirty="0" spc="4" kern="0">
+                <a:solidFill>
+                  <a:srgbClr val="E4E1D8"/>
+                </a:solidFill>
+                <a:latin typeface="Be Vietnam Pro" pitchFamily="34" charset="0"/>
+                <a:ea typeface="Be Vietnam Pro" pitchFamily="34" charset="-122"/>
+                <a:cs typeface="Be Vietnam Pro" pitchFamily="34" charset="-120"/>
+              </a:rPr>
+              <a:t> Primer:</a:t>
             </a:r>
             <a:r>
               <a:rPr lang="en-US" sz="2250" dirty="0" spc="1" kern="0">
@@ -4185,10 +4059,10 @@
                 <a:ea typeface="Be Vietnam Pro" pitchFamily="34" charset="-122"/>
                 <a:cs typeface="Be Vietnam Pro" pitchFamily="34" charset="-120"/>
               </a:rPr>
-              <a:t> nguồn</a:t>
-            </a:r>
-            <a:r>
-              <a:rPr lang="en-US" sz="2250" dirty="0" spc="-12" kern="0">
+              <a:t> phần cách</a:t>
+            </a:r>
+            <a:r>
+              <a:rPr lang="en-US" sz="2250" dirty="0" spc="0" kern="0">
                 <a:solidFill>
                   <a:srgbClr val="E4E1D8"/>
                 </a:solidFill>
@@ -4196,10 +4070,10 @@
                 <a:ea typeface="Be Vietnam Pro" pitchFamily="34" charset="-122"/>
                 <a:cs typeface="Be Vietnam Pro" pitchFamily="34" charset="-120"/>
               </a:rPr>
-              <a:t> tại</a:t>
-            </a:r>
-            <a:r>
-              <a:rPr lang="en-US" sz="2250" dirty="0" spc="-1" kern="0">
+              <a:t> tiếp</a:t>
+            </a:r>
+            <a:r>
+              <a:rPr lang="en-US" sz="2250" dirty="0" spc="2" kern="0">
                 <a:solidFill>
                   <a:srgbClr val="E4E1D8"/>
                 </a:solidFill>
@@ -4207,10 +4081,10 @@
                 <a:ea typeface="Be Vietnam Pro" pitchFamily="34" charset="-122"/>
                 <a:cs typeface="Be Vietnam Pro" pitchFamily="34" charset="-120"/>
               </a:rPr>
-              <a:t> commit</a:t>
-            </a:r>
-            <a:r>
-              <a:rPr lang="en-US" sz="2250" dirty="0" spc="4" kern="0">
+              <a:t> cận phỏng</a:t>
+            </a:r>
+            <a:r>
+              <a:rPr lang="en-US" sz="2250" dirty="0" spc="-13" kern="0">
                 <a:solidFill>
                   <a:srgbClr val="E4E1D8"/>
                 </a:solidFill>
@@ -4218,150 +4092,7 @@
                 <a:ea typeface="Be Vietnam Pro" pitchFamily="34" charset="-122"/>
                 <a:cs typeface="Be Vietnam Pro" pitchFamily="34" charset="-120"/>
               </a:rPr>
-              <a:t> cố</a:t>
-            </a:r>
-            <a:r>
-              <a:rPr lang="en-US" sz="2250" dirty="0" spc="19" kern="0">
-                <a:solidFill>
-                  <a:srgbClr val="E4E1D8"/>
-                </a:solidFill>
-                <a:latin typeface="Be Vietnam Pro" pitchFamily="34" charset="0"/>
-                <a:ea typeface="Be Vietnam Pro" pitchFamily="34" charset="-122"/>
-                <a:cs typeface="Be Vietnam Pro" pitchFamily="34" charset="-120"/>
-              </a:rPr>
-              <a:t> định</a:t>
-            </a:r>
-            <a:endParaRPr lang="en-US" sz="2250" dirty="0"/>
-          </a:p>
-          <a:p>
-            <a:pPr algn="l" marL="285750" indent="-204151">
-              <a:lnSpc>
-                <a:spcPts val="3150"/>
-              </a:lnSpc>
-              <a:buSzPct val="100000"/>
-              <a:buFont typeface="Arial"/>
-              <a:buChar char="•"/>
-            </a:pPr>
-            <a:r>
-              <a:rPr lang="en-US" sz="2250" dirty="0" spc="-16" kern="0">
-                <a:solidFill>
-                  <a:srgbClr val="E4E1D8"/>
-                </a:solidFill>
-                <a:latin typeface="Be Vietnam Pro" pitchFamily="34" charset="0"/>
-                <a:ea typeface="Be Vietnam Pro" pitchFamily="34" charset="-122"/>
-                <a:cs typeface="Be Vietnam Pro" pitchFamily="34" charset="-120"/>
-              </a:rPr>
-              <a:t>System</a:t>
-            </a:r>
-            <a:r>
-              <a:rPr lang="en-US" sz="2250" dirty="0" spc="0" kern="0">
-                <a:solidFill>
-                  <a:srgbClr val="E4E1D8"/>
-                </a:solidFill>
-                <a:latin typeface="Be Vietnam Pro" pitchFamily="34" charset="0"/>
-                <a:ea typeface="Be Vietnam Pro" pitchFamily="34" charset="-122"/>
-                <a:cs typeface="Be Vietnam Pro" pitchFamily="34" charset="-120"/>
-              </a:rPr>
-              <a:t> Design</a:t>
-            </a:r>
-            <a:r>
-              <a:rPr lang="en-US" sz="2250" dirty="0" spc="4" kern="0">
-                <a:solidFill>
-                  <a:srgbClr val="E4E1D8"/>
-                </a:solidFill>
-                <a:latin typeface="Be Vietnam Pro" pitchFamily="34" charset="0"/>
-                <a:ea typeface="Be Vietnam Pro" pitchFamily="34" charset="-122"/>
-                <a:cs typeface="Be Vietnam Pro" pitchFamily="34" charset="-120"/>
-              </a:rPr>
-              <a:t> Primer:</a:t>
-            </a:r>
-            <a:r>
-              <a:rPr lang="en-US" sz="2250" dirty="0" spc="-14" kern="0">
-                <a:solidFill>
-                  <a:srgbClr val="E4E1D8"/>
-                </a:solidFill>
-                <a:latin typeface="Be Vietnam Pro" pitchFamily="34" charset="0"/>
-                <a:ea typeface="Be Vietnam Pro" pitchFamily="34" charset="-122"/>
-                <a:cs typeface="Be Vietnam Pro" pitchFamily="34" charset="-120"/>
-              </a:rPr>
-              <a:t> How</a:t>
-            </a:r>
-            <a:r>
-              <a:rPr lang="en-US" sz="2250" dirty="0" spc="-15" kern="0">
-                <a:solidFill>
-                  <a:srgbClr val="E4E1D8"/>
-                </a:solidFill>
-                <a:latin typeface="Be Vietnam Pro" pitchFamily="34" charset="0"/>
-                <a:ea typeface="Be Vietnam Pro" pitchFamily="34" charset="-122"/>
-                <a:cs typeface="Be Vietnam Pro" pitchFamily="34" charset="-120"/>
-              </a:rPr>
-              <a:t> to</a:t>
-            </a:r>
-            <a:r>
-              <a:rPr lang="en-US" sz="2250" dirty="0" spc="-12" kern="0">
-                <a:solidFill>
-                  <a:srgbClr val="E4E1D8"/>
-                </a:solidFill>
-                <a:latin typeface="Be Vietnam Pro" pitchFamily="34" charset="0"/>
-                <a:ea typeface="Be Vietnam Pro" pitchFamily="34" charset="-122"/>
-                <a:cs typeface="Be Vietnam Pro" pitchFamily="34" charset="-120"/>
-              </a:rPr>
-              <a:t> approach</a:t>
-            </a:r>
-            <a:r>
-              <a:rPr lang="en-US" sz="2250" dirty="0" spc="1" kern="0">
-                <a:solidFill>
-                  <a:srgbClr val="E4E1D8"/>
-                </a:solidFill>
-                <a:latin typeface="Be Vietnam Pro" pitchFamily="34" charset="0"/>
-                <a:ea typeface="Be Vietnam Pro" pitchFamily="34" charset="-122"/>
-                <a:cs typeface="Be Vietnam Pro" pitchFamily="34" charset="-120"/>
-              </a:rPr>
-              <a:t> a</a:t>
-            </a:r>
-            <a:r>
-              <a:rPr lang="en-US" sz="2250" dirty="0" spc="-18" kern="0">
-                <a:solidFill>
-                  <a:srgbClr val="E4E1D8"/>
-                </a:solidFill>
-                <a:latin typeface="Be Vietnam Pro" pitchFamily="34" charset="0"/>
-                <a:ea typeface="Be Vietnam Pro" pitchFamily="34" charset="-122"/>
-                <a:cs typeface="Be Vietnam Pro" pitchFamily="34" charset="-120"/>
-              </a:rPr>
-              <a:t> system</a:t>
-            </a:r>
-            <a:r>
-              <a:rPr lang="en-US" sz="2250" dirty="0" spc="1" kern="0">
-                <a:solidFill>
-                  <a:srgbClr val="E4E1D8"/>
-                </a:solidFill>
-                <a:latin typeface="Be Vietnam Pro" pitchFamily="34" charset="0"/>
-                <a:ea typeface="Be Vietnam Pro" pitchFamily="34" charset="-122"/>
-                <a:cs typeface="Be Vietnam Pro" pitchFamily="34" charset="-120"/>
-              </a:rPr>
-              <a:t> design</a:t>
-            </a:r>
-            <a:r>
-              <a:rPr lang="en-US" sz="2250" dirty="0" spc="-16" kern="0">
-                <a:solidFill>
-                  <a:srgbClr val="E4E1D8"/>
-                </a:solidFill>
-                <a:latin typeface="Be Vietnam Pro" pitchFamily="34" charset="0"/>
-                <a:ea typeface="Be Vietnam Pro" pitchFamily="34" charset="-122"/>
-                <a:cs typeface="Be Vietnam Pro" pitchFamily="34" charset="-120"/>
-              </a:rPr>
-              <a:t> interview</a:t>
-            </a:r>
-            <a:r>
-              <a:rPr lang="en-US" sz="2250" dirty="0" spc="-2" kern="0">
-                <a:solidFill>
-                  <a:srgbClr val="E4E1D8"/>
-                </a:solidFill>
-                <a:latin typeface="Be Vietnam Pro" pitchFamily="34" charset="0"/>
-                <a:ea typeface="Be Vietnam Pro" pitchFamily="34" charset="-122"/>
-                <a:cs typeface="Be Vietnam Pro" pitchFamily="34" charset="-120"/>
-              </a:rPr>
-              <a:t> question</a:t>
+              <a:t> vấn</a:t>
             </a:r>
             <a:endParaRPr lang="en-US" sz="2250" dirty="0"/>
           </a:p>
@@ -4417,7 +4148,7 @@
               <a:t> ngày</a:t>
             </a:r>
             <a:r>
-              <a:rPr lang="en-US" sz="1800" dirty="0" spc="1" kern="0">
+              <a:rPr lang="en-US" sz="1800" dirty="0" spc="0" kern="0">
                 <a:solidFill>
                   <a:srgbClr val="9AA0B5"/>
                 </a:solidFill>
@@ -4425,10 +4156,10 @@
                 <a:ea typeface="Be Vietnam Pro" pitchFamily="34" charset="-122"/>
                 <a:cs typeface="Be Vietnam Pro" pitchFamily="34" charset="-120"/>
               </a:rPr>
-              <a:t> 2026-10-13.</a:t>
-            </a:r>
-            <a:r>
-              <a:rPr lang="en-US" sz="1800" dirty="0" spc="-6" kern="0">
+              <a:t> 2026-10-13;</a:t>
+            </a:r>
+            <a:r>
+              <a:rPr lang="en-US" sz="1800" dirty="0" spc="-3" kern="0">
                 <a:solidFill>
                   <a:srgbClr val="9AA0B5"/>
                 </a:solidFill>
@@ -4436,7 +4167,7 @@
                 <a:ea typeface="Be Vietnam Pro" pitchFamily="34" charset="-122"/>
                 <a:cs typeface="Be Vietnam Pro" pitchFamily="34" charset="-120"/>
               </a:rPr>
-              <a:t> Đây</a:t>
+              <a:t> khung</a:t>
             </a:r>
             <a:r>
               <a:rPr lang="en-US" sz="1800" dirty="0" spc="-1" kern="0">
@@ -4447,7 +4178,7 @@
                 <a:ea typeface="Be Vietnam Pro" pitchFamily="34" charset="-122"/>
                 <a:cs typeface="Be Vietnam Pro" pitchFamily="34" charset="-120"/>
               </a:rPr>
-              <a:t> là</a:t>
+              <a:t> kinh</a:t>
             </a:r>
             <a:r>
               <a:rPr lang="en-US" sz="1800" dirty="0" spc="-3" kern="0">
@@ -4458,7 +4189,40 @@
                 <a:ea typeface="Be Vietnam Pro" pitchFamily="34" charset="-122"/>
                 <a:cs typeface="Be Vietnam Pro" pitchFamily="34" charset="-120"/>
               </a:rPr>
-              <a:t> khung</a:t>
+              <a:t> nghiệm,</a:t>
+            </a:r>
+            <a:r>
+              <a:rPr lang="en-US" sz="1800" dirty="0" spc="-2" kern="0">
+                <a:solidFill>
+                  <a:srgbClr val="9AA0B5"/>
+                </a:solidFill>
+                <a:latin typeface="Be Vietnam Pro" pitchFamily="34" charset="0"/>
+                <a:ea typeface="Be Vietnam Pro" pitchFamily="34" charset="-122"/>
+                <a:cs typeface="Be Vietnam Pro" pitchFamily="34" charset="-120"/>
+              </a:rPr>
+              <a:t> không</a:t>
+            </a:r>
+            <a:r>
+              <a:rPr lang="en-US" sz="1800" dirty="0" spc="0" kern="0">
+                <a:solidFill>
+                  <a:srgbClr val="9AA0B5"/>
+                </a:solidFill>
+                <a:latin typeface="Be Vietnam Pro" pitchFamily="34" charset="0"/>
+                <a:ea typeface="Be Vietnam Pro" pitchFamily="34" charset="-122"/>
+                <a:cs typeface="Be Vietnam Pro" pitchFamily="34" charset="-120"/>
+              </a:rPr>
+              <a:t> phải</a:t>
+            </a:r>
+            <a:r>
+              <a:rPr lang="en-US" sz="1800" dirty="0" spc="-3" kern="0">
+                <a:solidFill>
+                  <a:srgbClr val="9AA0B5"/>
+                </a:solidFill>
+                <a:latin typeface="Be Vietnam Pro" pitchFamily="34" charset="0"/>
+                <a:ea typeface="Be Vietnam Pro" pitchFamily="34" charset="-122"/>
+                <a:cs typeface="Be Vietnam Pro" pitchFamily="34" charset="-120"/>
+              </a:rPr>
+              <a:t> tiêu</a:t>
             </a:r>
             <a:r>
               <a:rPr lang="en-US" sz="1800" dirty="0" spc="-1" kern="0">
@@ -4469,84 +4233,7 @@
                 <a:ea typeface="Be Vietnam Pro" pitchFamily="34" charset="-122"/>
                 <a:cs typeface="Be Vietnam Pro" pitchFamily="34" charset="-120"/>
               </a:rPr>
-              <a:t> kinh</a:t>
-            </a:r>
-            <a:r>
-              <a:rPr lang="en-US" sz="1800" dirty="0" spc="-3" kern="0">
-                <a:solidFill>
-                  <a:srgbClr val="9AA0B5"/>
-                </a:solidFill>
-                <a:latin typeface="Be Vietnam Pro" pitchFamily="34" charset="0"/>
-                <a:ea typeface="Be Vietnam Pro" pitchFamily="34" charset="-122"/>
-                <a:cs typeface="Be Vietnam Pro" pitchFamily="34" charset="-120"/>
-              </a:rPr>
-              <a:t> nghiệm,</a:t>
-            </a:r>
-            <a:r>
-              <a:rPr lang="en-US" sz="1800" dirty="0" spc="-2" kern="0">
-                <a:solidFill>
-                  <a:srgbClr val="9AA0B5"/>
-                </a:solidFill>
-                <a:latin typeface="Be Vietnam Pro" pitchFamily="34" charset="0"/>
-                <a:ea typeface="Be Vietnam Pro" pitchFamily="34" charset="-122"/>
-                <a:cs typeface="Be Vietnam Pro" pitchFamily="34" charset="-120"/>
-              </a:rPr>
-              <a:t> không</a:t>
-            </a:r>
-            <a:r>
-              <a:rPr lang="en-US" sz="1800" dirty="0" spc="0" kern="0">
-                <a:solidFill>
-                  <a:srgbClr val="9AA0B5"/>
-                </a:solidFill>
-                <a:latin typeface="Be Vietnam Pro" pitchFamily="34" charset="0"/>
-                <a:ea typeface="Be Vietnam Pro" pitchFamily="34" charset="-122"/>
-                <a:cs typeface="Be Vietnam Pro" pitchFamily="34" charset="-120"/>
-              </a:rPr>
-              <a:t> phải</a:t>
-            </a:r>
-            <a:r>
-              <a:rPr lang="en-US" sz="1800" dirty="0" spc="-3" kern="0">
-                <a:solidFill>
-                  <a:srgbClr val="9AA0B5"/>
-                </a:solidFill>
-                <a:latin typeface="Be Vietnam Pro" pitchFamily="34" charset="0"/>
-                <a:ea typeface="Be Vietnam Pro" pitchFamily="34" charset="-122"/>
-                <a:cs typeface="Be Vietnam Pro" pitchFamily="34" charset="-120"/>
-              </a:rPr>
-              <a:t> tiêu</a:t>
-            </a:r>
-            <a:r>
-              <a:rPr lang="en-US" sz="1800" dirty="0" spc="-1" kern="0">
-                <a:solidFill>
-                  <a:srgbClr val="9AA0B5"/>
-                </a:solidFill>
-                <a:latin typeface="Be Vietnam Pro" pitchFamily="34" charset="0"/>
-                <a:ea typeface="Be Vietnam Pro" pitchFamily="34" charset="-122"/>
-                <a:cs typeface="Be Vietnam Pro" pitchFamily="34" charset="-120"/>
-              </a:rPr>
-              <a:t> chuẩn</a:t>
-            </a:r>
-            <a:r>
-              <a:rPr lang="en-US" sz="1800" dirty="0" spc="0" kern="0">
-                <a:solidFill>
-                  <a:srgbClr val="9AA0B5"/>
-                </a:solidFill>
-                <a:latin typeface="Be Vietnam Pro" pitchFamily="34" charset="0"/>
-                <a:ea typeface="Be Vietnam Pro" pitchFamily="34" charset="-122"/>
-                <a:cs typeface="Be Vietnam Pro" pitchFamily="34" charset="-120"/>
-              </a:rPr>
-              <a:t> kỹ</a:t>
-            </a:r>
-            <a:r>
-              <a:rPr lang="en-US" sz="1800" dirty="0" spc="-7" kern="0">
-                <a:solidFill>
-                  <a:srgbClr val="9AA0B5"/>
-                </a:solidFill>
-                <a:latin typeface="Be Vietnam Pro" pitchFamily="34" charset="0"/>
-                <a:ea typeface="Be Vietnam Pro" pitchFamily="34" charset="-122"/>
-                <a:cs typeface="Be Vietnam Pro" pitchFamily="34" charset="-120"/>
-              </a:rPr>
-              <a:t> thuật.</a:t>
+              <a:t> chuẩn.</a:t>
             </a:r>
             <a:endParaRPr lang="en-US" sz="1800" dirty="0"/>
           </a:p>
@@ -5139,7 +4826,7 @@
               <a:t>Không</a:t>
             </a:r>
             <a:r>
-              <a:rPr lang="en-US" sz="7800" dirty="0" spc="0" kern="0">
+              <a:rPr lang="en-US" sz="7800" dirty="0" spc="-15" kern="0">
                 <a:solidFill>
                   <a:srgbClr val="14161C"/>
                 </a:solidFill>
@@ -5147,10 +4834,10 @@
                 <a:ea typeface="Bricolage Grotesque ExtraBold" pitchFamily="34" charset="-122"/>
                 <a:cs typeface="Bricolage Grotesque ExtraBold" pitchFamily="34" charset="-120"/>
               </a:rPr>
-              <a:t> bỏ</a:t>
-            </a:r>
-            <a:r>
-              <a:rPr lang="en-US" sz="7800" dirty="0" spc="-16" kern="0">
+              <a:t> sót</a:t>
+            </a:r>
+            <a:r>
+              <a:rPr lang="en-US" sz="7800" dirty="0" spc="29" kern="0">
                 <a:solidFill>
                   <a:srgbClr val="14161C"/>
                 </a:solidFill>
@@ -5158,10 +4845,10 @@
                 <a:ea typeface="Bricolage Grotesque ExtraBold" pitchFamily="34" charset="-122"/>
                 <a:cs typeface="Bricolage Grotesque ExtraBold" pitchFamily="34" charset="-120"/>
               </a:rPr>
-              <a:t> sót</a:t>
-            </a:r>
-            <a:r>
-              <a:rPr lang="en-US" sz="7800" dirty="0" spc="29" kern="0">
+              <a:t> điều</a:t>
+            </a:r>
+            <a:r>
+              <a:rPr lang="en-US" sz="7800" dirty="0" spc="-3" kern="0">
                 <a:solidFill>
                   <a:srgbClr val="14161C"/>
                 </a:solidFill>
@@ -5169,10 +4856,10 @@
                 <a:ea typeface="Bricolage Grotesque ExtraBold" pitchFamily="34" charset="-122"/>
                 <a:cs typeface="Bricolage Grotesque ExtraBold" pitchFamily="34" charset="-120"/>
               </a:rPr>
-              <a:t> điều</a:t>
-            </a:r>
-            <a:r>
-              <a:rPr lang="en-US" sz="7800" dirty="0" spc="-2" kern="0">
+              <a:t> quan</a:t>
+            </a:r>
+            <a:r>
+              <a:rPr lang="en-US" sz="7800" dirty="0" spc="4" kern="0">
                 <a:solidFill>
                   <a:srgbClr val="14161C"/>
                 </a:solidFill>
@@ -5180,10 +4867,10 @@
                 <a:ea typeface="Bricolage Grotesque ExtraBold" pitchFamily="34" charset="-122"/>
                 <a:cs typeface="Bricolage Grotesque ExtraBold" pitchFamily="34" charset="-120"/>
               </a:rPr>
-              <a:t> quan</a:t>
-            </a:r>
-            <a:r>
-              <a:rPr lang="en-US" sz="7800" dirty="0" spc="4" kern="0">
+              <a:t> trọng,</a:t>
+            </a:r>
+            <a:r>
+              <a:rPr lang="en-US" sz="7800" dirty="0" spc="-3" kern="0">
                 <a:solidFill>
                   <a:srgbClr val="14161C"/>
                 </a:solidFill>
@@ -5191,10 +4878,10 @@
                 <a:ea typeface="Bricolage Grotesque ExtraBold" pitchFamily="34" charset="-122"/>
                 <a:cs typeface="Bricolage Grotesque ExtraBold" pitchFamily="34" charset="-120"/>
               </a:rPr>
-              <a:t> trọng,</a:t>
-            </a:r>
-            <a:r>
-              <a:rPr lang="en-US" sz="7800" dirty="0" spc="-87" kern="0">
+              <a:t> luôn</a:t>
+            </a:r>
+            <a:r>
+              <a:rPr lang="en-US" sz="7800" dirty="0" spc="-1" kern="0">
                 <a:solidFill>
                   <a:srgbClr val="14161C"/>
                 </a:solidFill>
@@ -5202,10 +4889,10 @@
                 <a:ea typeface="Bricolage Grotesque ExtraBold" pitchFamily="34" charset="-122"/>
                 <a:cs typeface="Bricolage Grotesque ExtraBold" pitchFamily="34" charset="-120"/>
               </a:rPr>
-              <a:t> và</a:t>
-            </a:r>
-            <a:r>
-              <a:rPr lang="en-US" sz="7800" dirty="0" spc="-3" kern="0">
+              <a:t> biết</a:t>
+            </a:r>
+            <a:r>
+              <a:rPr lang="en-US" sz="7800" dirty="0" spc="-19" kern="0">
                 <a:solidFill>
                   <a:srgbClr val="14161C"/>
                 </a:solidFill>
@@ -5213,40 +4900,7 @@
                 <a:ea typeface="Bricolage Grotesque ExtraBold" pitchFamily="34" charset="-122"/>
                 <a:cs typeface="Bricolage Grotesque ExtraBold" pitchFamily="34" charset="-120"/>
               </a:rPr>
-              <a:t> luôn</a:t>
-            </a:r>
-            <a:r>
-              <a:rPr lang="en-US" sz="7800" dirty="0" spc="-1" kern="0">
-                <a:solidFill>
-                  <a:srgbClr val="14161C"/>
-                </a:solidFill>
-                <a:latin typeface="Bricolage Grotesque ExtraBold" pitchFamily="34" charset="0"/>
-                <a:ea typeface="Bricolage Grotesque ExtraBold" pitchFamily="34" charset="-122"/>
-                <a:cs typeface="Bricolage Grotesque ExtraBold" pitchFamily="34" charset="-120"/>
-              </a:rPr>
-              <a:t> biết</a:t>
-            </a:r>
-            <a:r>
-              <a:rPr lang="en-US" sz="7800" dirty="0" spc="-20" kern="0">
-                <a:solidFill>
-                  <a:srgbClr val="14161C"/>
-                </a:solidFill>
-                <a:latin typeface="Bricolage Grotesque ExtraBold" pitchFamily="34" charset="0"/>
-                <a:ea typeface="Bricolage Grotesque ExtraBold" pitchFamily="34" charset="-122"/>
-                <a:cs typeface="Bricolage Grotesque ExtraBold" pitchFamily="34" charset="-120"/>
-              </a:rPr>
               <a:t> mình</a:t>
-            </a:r>
-            <a:r>
-              <a:rPr lang="en-US" sz="7800" dirty="0" spc="8" kern="0">
-                <a:solidFill>
-                  <a:srgbClr val="14161C"/>
-                </a:solidFill>
-                <a:latin typeface="Bricolage Grotesque ExtraBold" pitchFamily="34" charset="0"/>
-                <a:ea typeface="Bricolage Grotesque ExtraBold" pitchFamily="34" charset="-122"/>
-                <a:cs typeface="Bricolage Grotesque ExtraBold" pitchFamily="34" charset="-120"/>
-              </a:rPr>
-              <a:t> đang</a:t>
             </a:r>
             <a:r>
               <a:rPr lang="en-US" sz="7800" dirty="0" spc="-2" kern="0">
@@ -6941,7 +6595,7 @@
                         <a:t> dữ</a:t>
                       </a:r>
                       <a:r>
-                        <a:rPr lang="en-US" sz="2400" dirty="0" spc="-2" kern="0">
+                        <a:rPr lang="en-US" sz="2400" dirty="0" spc="-1" kern="0">
                           <a:solidFill>
                             <a:srgbClr val="14161C"/>
                           </a:solidFill>
@@ -6949,18 +6603,7 @@
                           <a:ea typeface="Be Vietnam Pro" pitchFamily="34" charset="-122"/>
                           <a:cs typeface="Be Vietnam Pro" pitchFamily="34" charset="-120"/>
                         </a:rPr>
-                        <a:t> liệu</a:t>
-                      </a:r>
-                      <a:r>
-                        <a:rPr lang="en-US" sz="2400" dirty="0" spc="-15" kern="0">
-                          <a:solidFill>
-                            <a:srgbClr val="14161C"/>
-                          </a:solidFill>
-                          <a:latin typeface="Be Vietnam Pro" pitchFamily="34" charset="0"/>
-                          <a:ea typeface="Be Vietnam Pro" pitchFamily="34" charset="-122"/>
-                          <a:cs typeface="Be Vietnam Pro" pitchFamily="34" charset="-120"/>
-                        </a:rPr>
-                        <a:t> và</a:t>
+                        <a:t> liệu,</a:t>
                       </a:r>
                       <a:r>
                         <a:rPr lang="en-US" sz="2400" dirty="0" spc="16" kern="0">
@@ -7035,7 +6678,7 @@
                         <a:buNone/>
                       </a:pPr>
                       <a:r>
-                        <a:rPr lang="en-US" sz="2400" dirty="0" spc="1" kern="0">
+                        <a:rPr lang="en-US" sz="2400" dirty="0" spc="9" kern="0">
                           <a:solidFill>
                             <a:srgbClr val="14161C"/>
                           </a:solidFill>
@@ -7043,18 +6686,7 @@
                           <a:ea typeface="Be Vietnam Pro" pitchFamily="34" charset="-122"/>
                           <a:cs typeface="Be Vietnam Pro" pitchFamily="34" charset="-120"/>
                         </a:rPr>
-                        <a:t>Số</a:t>
-                      </a:r>
-                      <a:r>
-                        <a:rPr lang="en-US" sz="2400" dirty="0" spc="7" kern="0">
-                          <a:solidFill>
-                            <a:srgbClr val="14161C"/>
-                          </a:solidFill>
-                          <a:latin typeface="Be Vietnam Pro" pitchFamily="34" charset="0"/>
-                          <a:ea typeface="Be Vietnam Pro" pitchFamily="34" charset="-122"/>
-                          <a:cs typeface="Be Vietnam Pro" pitchFamily="34" charset="-120"/>
-                        </a:rPr>
-                        <a:t> đường</a:t>
+                        <a:t>Đường</a:t>
                       </a:r>
                       <a:r>
                         <a:rPr lang="en-US" sz="2400" dirty="0" spc="2" kern="0">
@@ -7079,7 +6711,7 @@
                         <a:t> tạo</a:t>
                       </a:r>
                       <a:r>
-                        <a:rPr lang="en-US" sz="2400" dirty="0" spc="2" kern="0">
+                        <a:rPr lang="en-US" sz="2400" dirty="0" spc="1" kern="0">
                           <a:solidFill>
                             <a:srgbClr val="14161C"/>
                           </a:solidFill>
@@ -7090,7 +6722,7 @@
                         <a:t> mỗi</a:t>
                       </a:r>
                       <a:r>
-                        <a:rPr lang="en-US" sz="2400" dirty="0" spc="-12" kern="0">
+                        <a:rPr lang="en-US" sz="2400" dirty="0" spc="-11" kern="0">
                           <a:solidFill>
                             <a:srgbClr val="14161C"/>
                           </a:solidFill>
@@ -7101,7 +6733,7 @@
                         <a:t> ngày;</a:t>
                       </a:r>
                       <a:r>
-                        <a:rPr lang="en-US" sz="2400" dirty="0" spc="-6" kern="0">
+                        <a:rPr lang="en-US" sz="2400" dirty="0" spc="-8" kern="0">
                           <a:solidFill>
                             <a:srgbClr val="14161C"/>
                           </a:solidFill>
@@ -7123,7 +6755,7 @@
                         <a:t> lệ</a:t>
                       </a:r>
                       <a:r>
-                        <a:rPr lang="en-US" sz="2400" dirty="0" spc="3" kern="0">
+                        <a:rPr lang="en-US" sz="2400" dirty="0" spc="4" kern="0">
                           <a:solidFill>
                             <a:srgbClr val="14161C"/>
                           </a:solidFill>
@@ -7134,7 +6766,7 @@
                         <a:t> mở</a:t>
                       </a:r>
                       <a:r>
-                        <a:rPr lang="en-US" sz="2400" dirty="0" spc="-8" kern="0">
+                        <a:rPr lang="en-US" sz="2400" dirty="0" spc="-18" kern="0">
                           <a:solidFill>
                             <a:srgbClr val="14161C"/>
                           </a:solidFill>
@@ -7142,18 +6774,7 @@
                           <a:ea typeface="Be Vietnam Pro" pitchFamily="34" charset="-122"/>
                           <a:cs typeface="Be Vietnam Pro" pitchFamily="34" charset="-120"/>
                         </a:rPr>
-                        <a:t> so</a:t>
-                      </a:r>
-                      <a:r>
-                        <a:rPr lang="en-US" sz="2400" dirty="0" spc="-13" kern="0">
-                          <a:solidFill>
-                            <a:srgbClr val="14161C"/>
-                          </a:solidFill>
-                          <a:latin typeface="Be Vietnam Pro" pitchFamily="34" charset="0"/>
-                          <a:ea typeface="Be Vietnam Pro" pitchFamily="34" charset="-122"/>
-                          <a:cs typeface="Be Vietnam Pro" pitchFamily="34" charset="-120"/>
-                        </a:rPr>
-                        <a:t> với</a:t>
+                        <a:t> trên</a:t>
                       </a:r>
                       <a:r>
                         <a:rPr lang="en-US" sz="2400" dirty="0" spc="-9" kern="0">
@@ -8432,7 +8053,7 @@
               <a:t>Đủ</a:t>
             </a:r>
             <a:r>
-              <a:rPr lang="en-US" sz="2550" dirty="0" spc="18" kern="0">
+              <a:rPr lang="en-US" sz="2550" dirty="0" spc="-37" kern="0">
                 <a:solidFill>
                   <a:srgbClr val="E4E1D8"/>
                 </a:solidFill>
@@ -8440,10 +8061,10 @@
                 <a:ea typeface="Be Vietnam Pro" pitchFamily="34" charset="-122"/>
                 <a:cs typeface="Be Vietnam Pro" pitchFamily="34" charset="-120"/>
               </a:rPr>
-              <a:t> để</a:t>
-            </a:r>
-            <a:r>
-              <a:rPr lang="en-US" sz="2550" dirty="0" spc="-37" kern="0">
+              <a:t> kể</a:t>
+            </a:r>
+            <a:r>
+              <a:rPr lang="en-US" sz="2550" dirty="0" spc="-5" kern="0">
                 <a:solidFill>
                   <a:srgbClr val="E4E1D8"/>
                 </a:solidFill>
@@ -8451,10 +8072,10 @@
                 <a:ea typeface="Be Vietnam Pro" pitchFamily="34" charset="-122"/>
                 <a:cs typeface="Be Vietnam Pro" pitchFamily="34" charset="-120"/>
               </a:rPr>
-              <a:t> kể</a:t>
-            </a:r>
-            <a:r>
-              <a:rPr lang="en-US" sz="2550" dirty="0" spc="-5" kern="0">
+              <a:t> một</a:t>
+            </a:r>
+            <a:r>
+              <a:rPr lang="en-US" sz="2550" dirty="0" spc="-21" kern="0">
                 <a:solidFill>
                   <a:srgbClr val="E4E1D8"/>
                 </a:solidFill>
@@ -8462,10 +8083,10 @@
                 <a:ea typeface="Be Vietnam Pro" pitchFamily="34" charset="-122"/>
                 <a:cs typeface="Be Vietnam Pro" pitchFamily="34" charset="-120"/>
               </a:rPr>
-              <a:t> một</a:t>
-            </a:r>
-            <a:r>
-              <a:rPr lang="en-US" sz="2550" dirty="0" spc="-21" kern="0">
+              <a:t> yêu</a:t>
+            </a:r>
+            <a:r>
+              <a:rPr lang="en-US" sz="2550" dirty="0" spc="2" kern="0">
                 <a:solidFill>
                   <a:srgbClr val="E4E1D8"/>
                 </a:solidFill>
@@ -8473,10 +8094,10 @@
                 <a:ea typeface="Be Vietnam Pro" pitchFamily="34" charset="-122"/>
                 <a:cs typeface="Be Vietnam Pro" pitchFamily="34" charset="-120"/>
               </a:rPr>
-              <a:t> yêu</a:t>
-            </a:r>
-            <a:r>
-              <a:rPr lang="en-US" sz="2550" dirty="0" spc="2" kern="0">
+              <a:t> cầu</a:t>
+            </a:r>
+            <a:r>
+              <a:rPr lang="en-US" sz="2550" dirty="0" spc="34" kern="0">
                 <a:solidFill>
                   <a:srgbClr val="E4E1D8"/>
                 </a:solidFill>
@@ -8484,10 +8105,10 @@
                 <a:ea typeface="Be Vietnam Pro" pitchFamily="34" charset="-122"/>
                 <a:cs typeface="Be Vietnam Pro" pitchFamily="34" charset="-120"/>
               </a:rPr>
-              <a:t> cầu</a:t>
-            </a:r>
-            <a:r>
-              <a:rPr lang="en-US" sz="2550" dirty="0" spc="34" kern="0">
+              <a:t> đi</a:t>
+            </a:r>
+            <a:r>
+              <a:rPr lang="en-US" sz="2550" dirty="0" spc="-15" kern="0">
                 <a:solidFill>
                   <a:srgbClr val="E4E1D8"/>
                 </a:solidFill>
@@ -8495,10 +8116,10 @@
                 <a:ea typeface="Be Vietnam Pro" pitchFamily="34" charset="-122"/>
                 <a:cs typeface="Be Vietnam Pro" pitchFamily="34" charset="-120"/>
               </a:rPr>
-              <a:t> đi</a:t>
-            </a:r>
-            <a:r>
-              <a:rPr lang="en-US" sz="2550" dirty="0" spc="-19" kern="0">
+              <a:t> về,</a:t>
+            </a:r>
+            <a:r>
+              <a:rPr lang="en-US" sz="2550" dirty="0" spc="6" kern="0">
                 <a:solidFill>
                   <a:srgbClr val="E4E1D8"/>
                 </a:solidFill>
@@ -8506,43 +8127,10 @@
                 <a:ea typeface="Be Vietnam Pro" pitchFamily="34" charset="-122"/>
                 <a:cs typeface="Be Vietnam Pro" pitchFamily="34" charset="-120"/>
               </a:rPr>
-              <a:t> và</a:t>
-            </a:r>
-            <a:r>
-              <a:rPr lang="en-US" sz="2550" dirty="0" spc="-13" kern="0">
-                <a:solidFill>
-                  <a:srgbClr val="E4E1D8"/>
-                </a:solidFill>
-                <a:latin typeface="Be Vietnam Pro" pitchFamily="34" charset="0"/>
-                <a:ea typeface="Be Vietnam Pro" pitchFamily="34" charset="-122"/>
-                <a:cs typeface="Be Vietnam Pro" pitchFamily="34" charset="-120"/>
-              </a:rPr>
-              <a:t> về.</a:t>
-            </a:r>
-            <a:r>
-              <a:rPr lang="en-US" sz="2550" dirty="0" spc="7" kern="0">
-                <a:solidFill>
-                  <a:srgbClr val="E4E1D8"/>
-                </a:solidFill>
-                <a:latin typeface="Be Vietnam Pro" pitchFamily="34" charset="0"/>
-                <a:ea typeface="Be Vietnam Pro" pitchFamily="34" charset="-122"/>
-                <a:cs typeface="Be Vietnam Pro" pitchFamily="34" charset="-120"/>
-              </a:rPr>
-              <a:t> Chưa</a:t>
+              <a:t> chưa</a:t>
             </a:r>
             <a:r>
               <a:rPr lang="en-US" sz="2550" dirty="0" spc="0" kern="0">
-                <a:solidFill>
-                  <a:srgbClr val="E4E1D8"/>
-                </a:solidFill>
-                <a:latin typeface="Be Vietnam Pro" pitchFamily="34" charset="0"/>
-                <a:ea typeface="Be Vietnam Pro" pitchFamily="34" charset="-122"/>
-                <a:cs typeface="Be Vietnam Pro" pitchFamily="34" charset="-120"/>
-              </a:rPr>
-              <a:t> cần</a:t>
-            </a:r>
-            <a:r>
-              <a:rPr lang="en-US" sz="2550" dirty="0" spc="-1" kern="0">
                 <a:solidFill>
                   <a:srgbClr val="E4E1D8"/>
                 </a:solidFill>
@@ -11695,10 +11283,10 @@
                 <a:ea typeface="Be Vietnam Pro" pitchFamily="34" charset="-122"/>
                 <a:cs typeface="Be Vietnam Pro" pitchFamily="34" charset="-120"/>
               </a:rPr>
-              <a:t> nào</a:t>
-            </a:r>
-            <a:r>
-              <a:rPr lang="en-US" sz="3000" b="1" dirty="0" spc="0" kern="0">
+              <a:t> làm</a:t>
+            </a:r>
+            <a:r>
+              <a:rPr lang="en-US" sz="3000" b="1" dirty="0" spc="-4" kern="0">
                 <a:solidFill>
                   <a:srgbClr val="14161C"/>
                 </a:solidFill>
@@ -11706,7 +11294,7 @@
                 <a:ea typeface="Be Vietnam Pro" pitchFamily="34" charset="-122"/>
                 <a:cs typeface="Be Vietnam Pro" pitchFamily="34" charset="-120"/>
               </a:rPr>
-              <a:t> làm</a:t>
+              <a:t> cả</a:t>
             </a:r>
             <a:r>
               <a:rPr lang="en-US" sz="3000" b="1" dirty="0" spc="-5" kern="0">
@@ -11717,7 +11305,7 @@
                 <a:ea typeface="Be Vietnam Pro" pitchFamily="34" charset="-122"/>
                 <a:cs typeface="Be Vietnam Pro" pitchFamily="34" charset="-120"/>
               </a:rPr>
-              <a:t> cả hệ</a:t>
+              <a:t> hệ</a:t>
             </a:r>
             <a:r>
               <a:rPr lang="en-US" sz="3000" b="1" dirty="0" spc="-9" kern="0">
@@ -11742,6 +11330,17 @@
               <a:t> ngừng</a:t>
             </a:r>
             <a:r>
+              <a:rPr lang="en-US" sz="3000" b="1" dirty="0" spc="-2" kern="0">
+                <a:solidFill>
+                  <a:srgbClr val="14161C"/>
+                </a:solidFill>
+                <a:latin typeface="Be Vietnam Pro" pitchFamily="34" charset="0"/>
+                <a:ea typeface="Be Vietnam Pro" pitchFamily="34" charset="-122"/>
+                <a:cs typeface="Be Vietnam Pro" pitchFamily="34" charset="-120"/>
+              </a:rPr>
+              <a:t> cần</a:t>
+            </a:r>
+            <a:r>
               <a:rPr lang="en-US" sz="3000" b="1" dirty="0" spc="3" kern="0">
                 <a:solidFill>
                   <a:srgbClr val="14161C"/>
@@ -11750,10 +11349,10 @@
                 <a:ea typeface="Be Vietnam Pro" pitchFamily="34" charset="-122"/>
                 <a:cs typeface="Be Vietnam Pro" pitchFamily="34" charset="-120"/>
               </a:rPr>
-              <a:t> thì</a:t>
-            </a:r>
-            <a:r>
-              <a:rPr lang="en-US" sz="3000" b="1" dirty="0" spc="-3" kern="0">
+              <a:t> dự</a:t>
+            </a:r>
+            <a:r>
+              <a:rPr lang="en-US" sz="3000" b="1" dirty="0" spc="-10" kern="0">
                 <a:solidFill>
                   <a:srgbClr val="14161C"/>
                 </a:solidFill>
@@ -11761,40 +11360,7 @@
                 <a:ea typeface="Be Vietnam Pro" pitchFamily="34" charset="-122"/>
                 <a:cs typeface="Be Vietnam Pro" pitchFamily="34" charset="-120"/>
               </a:rPr>
-              <a:t> cần</a:t>
-            </a:r>
-            <a:r>
-              <a:rPr lang="en-US" sz="3000" b="1" dirty="0" spc="3" kern="0">
-                <a:solidFill>
-                  <a:srgbClr val="14161C"/>
-                </a:solidFill>
-                <a:latin typeface="Be Vietnam Pro" pitchFamily="34" charset="0"/>
-                <a:ea typeface="Be Vietnam Pro" pitchFamily="34" charset="-122"/>
-                <a:cs typeface="Be Vietnam Pro" pitchFamily="34" charset="-120"/>
-              </a:rPr>
-              <a:t> phương án</a:t>
-            </a:r>
-            <a:r>
-              <a:rPr lang="en-US" sz="3000" b="1" dirty="0" spc="-9" kern="0">
-                <a:solidFill>
-                  <a:srgbClr val="14161C"/>
-                </a:solidFill>
-                <a:latin typeface="Be Vietnam Pro" pitchFamily="34" charset="0"/>
-                <a:ea typeface="Be Vietnam Pro" pitchFamily="34" charset="-122"/>
-                <a:cs typeface="Be Vietnam Pro" pitchFamily="34" charset="-120"/>
-              </a:rPr>
-              <a:t> thay</a:t>
-            </a:r>
-            <a:r>
-              <a:rPr lang="en-US" sz="3000" b="1" dirty="0" spc="-2" kern="0">
-                <a:solidFill>
-                  <a:srgbClr val="14161C"/>
-                </a:solidFill>
-                <a:latin typeface="Be Vietnam Pro" pitchFamily="34" charset="0"/>
-                <a:ea typeface="Be Vietnam Pro" pitchFamily="34" charset="-122"/>
-                <a:cs typeface="Be Vietnam Pro" pitchFamily="34" charset="-120"/>
-              </a:rPr>
-              <a:t> thế.</a:t>
+              <a:t> phòng.</a:t>
             </a:r>
             <a:endParaRPr lang="en-US" sz="3000" dirty="0"/>
           </a:p>
@@ -14695,7 +14261,7 @@
               <a:t> dữ</a:t>
             </a:r>
             <a:r>
-              <a:rPr lang="en-US" sz="2700" dirty="0" spc="-1" kern="0">
+              <a:rPr lang="en-US" sz="2700" dirty="0" spc="0" kern="0">
                 <a:solidFill>
                   <a:srgbClr val="E4E1D8"/>
                 </a:solidFill>
@@ -14703,29 +14269,7 @@
                 <a:ea typeface="Be Vietnam Pro" pitchFamily="34" charset="-122"/>
                 <a:cs typeface="Be Vietnam Pro" pitchFamily="34" charset="-120"/>
               </a:rPr>
-              <a:t> liệu</a:t>
-            </a:r>
-            <a:r>
-              <a:rPr lang="en-US" sz="2700" dirty="0" spc="-13" kern="0">
-                <a:solidFill>
-                  <a:srgbClr val="E4E1D8"/>
-                </a:solidFill>
-                <a:latin typeface="Be Vietnam Pro" pitchFamily="34" charset="0"/>
-                <a:ea typeface="Be Vietnam Pro" pitchFamily="34" charset="-122"/>
-                <a:cs typeface="Be Vietnam Pro" pitchFamily="34" charset="-120"/>
-              </a:rPr>
-              <a:t> hay</a:t>
-            </a:r>
-            <a:r>
-              <a:rPr lang="en-US" sz="2700" dirty="0" spc="1" kern="0">
-                <a:solidFill>
-                  <a:srgbClr val="E4E1D8"/>
-                </a:solidFill>
-                <a:latin typeface="Be Vietnam Pro" pitchFamily="34" charset="0"/>
-                <a:ea typeface="Be Vietnam Pro" pitchFamily="34" charset="-122"/>
-                <a:cs typeface="Be Vietnam Pro" pitchFamily="34" charset="-120"/>
-              </a:rPr>
-              <a:t> cache.</a:t>
+              <a:t> liệu, cache.</a:t>
             </a:r>
             <a:endParaRPr lang="en-US" sz="2700" dirty="0"/>
           </a:p>

--- a/system-design-101/vi/lessons/sd-05-004/slides/sd-05-004.pptx
+++ b/system-design-101/vi/lessons/sd-05-004/slides/sd-05-004.pptx
@@ -13143,7 +13143,7 @@
               <a:t>Chưa</a:t>
             </a:r>
             <a:r>
-              <a:rPr lang="en-US" sz="6900" dirty="0" spc="2" kern="0">
+              <a:rPr lang="en-US" sz="6900" dirty="0" spc="-28" kern="0">
                 <a:solidFill>
                   <a:srgbClr val="F3EEE3"/>
                 </a:solidFill>
@@ -13151,10 +13151,10 @@
                 <a:ea typeface="Bricolage Grotesque ExtraBold" pitchFamily="34" charset="-122"/>
                 <a:cs typeface="Bricolage Grotesque ExtraBold" pitchFamily="34" charset="-120"/>
               </a:rPr>
-              <a:t> biết</a:t>
-            </a:r>
-            <a:r>
-              <a:rPr lang="en-US" sz="6900" dirty="0" spc="0" kern="0">
+              <a:t> rõ</a:t>
+            </a:r>
+            <a:r>
+              <a:rPr lang="en-US" sz="6900" dirty="0" spc="2" kern="0">
                 <a:solidFill>
                   <a:srgbClr val="F3EEE3"/>
                 </a:solidFill>
@@ -13162,10 +13162,10 @@
                 <a:ea typeface="Bricolage Grotesque ExtraBold" pitchFamily="34" charset="-122"/>
                 <a:cs typeface="Bricolage Grotesque ExtraBold" pitchFamily="34" charset="-120"/>
               </a:rPr>
-              <a:t> quy</a:t>
-            </a:r>
-            <a:r>
-              <a:rPr lang="en-US" sz="6900" dirty="0" spc="-5" kern="0">
+              <a:t> số</a:t>
+            </a:r>
+            <a:r>
+              <a:rPr lang="en-US" sz="6900" dirty="0" spc="-59" kern="0">
                 <a:solidFill>
                   <a:srgbClr val="F3EEE3"/>
                 </a:solidFill>
@@ -13173,10 +13173,10 @@
                 <a:ea typeface="Bricolage Grotesque ExtraBold" pitchFamily="34" charset="-122"/>
                 <a:cs typeface="Bricolage Grotesque ExtraBold" pitchFamily="34" charset="-120"/>
               </a:rPr>
-              <a:t> mô:</a:t>
-            </a:r>
-            <a:r>
-              <a:rPr lang="en-US" sz="6900" dirty="0" spc="1" kern="0">
+              <a:t> người,</a:t>
+            </a:r>
+            <a:r>
+              <a:rPr lang="en-US" sz="6900" dirty="0" spc="-29" kern="0">
                 <a:solidFill>
                   <a:srgbClr val="F3EEE3"/>
                 </a:solidFill>
@@ -13184,10 +13184,10 @@
                 <a:ea typeface="Bricolage Grotesque ExtraBold" pitchFamily="34" charset="-122"/>
                 <a:cs typeface="Bricolage Grotesque ExtraBold" pitchFamily="34" charset="-120"/>
               </a:rPr>
-              <a:t> bỏ</a:t>
-            </a:r>
-            <a:r>
-              <a:rPr lang="en-US" sz="6900" dirty="0" spc="-9" kern="0">
+              <a:t> tốc</a:t>
+            </a:r>
+            <a:r>
+              <a:rPr lang="en-US" sz="6900" dirty="0" spc="9" kern="0">
                 <a:solidFill>
                   <a:srgbClr val="F3EEE3"/>
                 </a:solidFill>
@@ -13195,10 +13195,10 @@
                 <a:ea typeface="Bricolage Grotesque ExtraBold" pitchFamily="34" charset="-122"/>
                 <a:cs typeface="Bricolage Grotesque ExtraBold" pitchFamily="34" charset="-120"/>
               </a:rPr>
-              <a:t> sót</a:t>
-            </a:r>
-            <a:r>
-              <a:rPr lang="en-US" sz="6900" dirty="0" spc="-95" kern="0">
+              <a:t> độ:</a:t>
+            </a:r>
+            <a:r>
+              <a:rPr lang="en-US" sz="6900" dirty="0" spc="7" kern="0">
                 <a:solidFill>
                   <a:srgbClr val="F3EEE3"/>
                 </a:solidFill>
@@ -13206,10 +13206,21 @@
                 <a:ea typeface="Bricolage Grotesque ExtraBold" pitchFamily="34" charset="-122"/>
                 <a:cs typeface="Bricolage Grotesque ExtraBold" pitchFamily="34" charset="-120"/>
               </a:rPr>
+              <a:t> thiếu</a:t>
+            </a:r>
+            <a:r>
+              <a:rPr lang="en-US" sz="6900" dirty="0" spc="-95" kern="0">
+                <a:solidFill>
+                  <a:srgbClr val="F3EEE3"/>
+                </a:solidFill>
+                <a:latin typeface="Bricolage Grotesque ExtraBold" pitchFamily="34" charset="0"/>
+                <a:ea typeface="Bricolage Grotesque ExtraBold" pitchFamily="34" charset="-122"/>
+                <a:cs typeface="Bricolage Grotesque ExtraBold" pitchFamily="34" charset="-120"/>
+              </a:rPr>
               <a:t> bước</a:t>
             </a:r>
             <a:r>
-              <a:rPr lang="en-US" sz="6900" dirty="0" spc="-39" kern="0">
+              <a:rPr lang="en-US" sz="6900" dirty="0" spc="-40" kern="0">
                 <a:solidFill>
                   <a:srgbClr val="F3EEE3"/>
                 </a:solidFill>

--- a/system-design-101/vi/lessons/sd-05-004/slides/sd-05-004.pptx
+++ b/system-design-101/vi/lessons/sd-05-004/slides/sd-05-004.pptx
@@ -3992,7 +3992,7 @@
       </p:sp>
       <p:sp>
         <p:nvSpPr>
-          <p:cNvPr id="12" name="Text 10"/>
+          <p:cNvPr id="12" name="Text richtext-1792370309386-40797472"/>
           <p:cNvSpPr/>
           <p:nvPr/>
         </p:nvSpPr>
@@ -4011,13 +4011,106 @@
           <a:bodyPr wrap="square" lIns="0" tIns="5001" rIns="0" bIns="-5001" rtlCol="0" anchor="t"/>
           <a:lstStyle/>
           <a:p>
-            <a:pPr algn="l" indent="0" marL="0">
+            <a:pPr algn="l" marL="285750" indent="-204151">
               <a:lnSpc>
                 <a:spcPts val="3150"/>
               </a:lnSpc>
-              <a:buNone/>
+              <a:spcAft>
+                <a:spcPts val="1050"/>
+              </a:spcAft>
+              <a:buSzPct val="100000"/>
+              <a:buFont typeface="Arial"/>
+              <a:buChar char="•"/>
             </a:pPr>
             <a:r>
+              <a:rPr lang="en-US" sz="2250" dirty="0" spc="-5" kern="0">
+                <a:solidFill>
+                  <a:srgbClr val="E4E1D8"/>
+                </a:solidFill>
+                <a:latin typeface="Be Vietnam Pro" pitchFamily="34" charset="0"/>
+                <a:ea typeface="Be Vietnam Pro" pitchFamily="34" charset="-122"/>
+                <a:cs typeface="Be Vietnam Pro" pitchFamily="34" charset="-120"/>
+              </a:rPr>
+              <a:t>ByteByteGo,</a:t>
+            </a:r>
+            <a:r>
+              <a:rPr lang="en-US" sz="2250" dirty="0" spc="-3" kern="0">
+                <a:solidFill>
+                  <a:srgbClr val="E4E1D8"/>
+                </a:solidFill>
+                <a:latin typeface="Be Vietnam Pro" pitchFamily="34" charset="0"/>
+                <a:ea typeface="Be Vietnam Pro" pitchFamily="34" charset="-122"/>
+                <a:cs typeface="Be Vietnam Pro" pitchFamily="34" charset="-120"/>
+              </a:rPr>
+              <a:t> bài</a:t>
+            </a:r>
+            <a:r>
+              <a:rPr lang="en-US" sz="2250" dirty="0" spc="1" kern="0">
+                <a:solidFill>
+                  <a:srgbClr val="E4E1D8"/>
+                </a:solidFill>
+                <a:latin typeface="Be Vietnam Pro" pitchFamily="34" charset="0"/>
+                <a:ea typeface="Be Vietnam Pro" pitchFamily="34" charset="-122"/>
+                <a:cs typeface="Be Vietnam Pro" pitchFamily="34" charset="-120"/>
+              </a:rPr>
+              <a:t> nguồn</a:t>
+            </a:r>
+            <a:r>
+              <a:rPr lang="en-US" sz="2250" dirty="0" spc="-12" kern="0">
+                <a:solidFill>
+                  <a:srgbClr val="E4E1D8"/>
+                </a:solidFill>
+                <a:latin typeface="Be Vietnam Pro" pitchFamily="34" charset="0"/>
+                <a:ea typeface="Be Vietnam Pro" pitchFamily="34" charset="-122"/>
+                <a:cs typeface="Be Vietnam Pro" pitchFamily="34" charset="-120"/>
+              </a:rPr>
+              <a:t> tại</a:t>
+            </a:r>
+            <a:r>
+              <a:rPr lang="en-US" sz="2250" dirty="0" spc="-1" kern="0">
+                <a:solidFill>
+                  <a:srgbClr val="E4E1D8"/>
+                </a:solidFill>
+                <a:latin typeface="Be Vietnam Pro" pitchFamily="34" charset="0"/>
+                <a:ea typeface="Be Vietnam Pro" pitchFamily="34" charset="-122"/>
+                <a:cs typeface="Be Vietnam Pro" pitchFamily="34" charset="-120"/>
+              </a:rPr>
+              <a:t> commit</a:t>
+            </a:r>
+            <a:r>
+              <a:rPr lang="en-US" sz="2250" dirty="0" spc="4" kern="0">
+                <a:solidFill>
+                  <a:srgbClr val="E4E1D8"/>
+                </a:solidFill>
+                <a:latin typeface="Be Vietnam Pro" pitchFamily="34" charset="0"/>
+                <a:ea typeface="Be Vietnam Pro" pitchFamily="34" charset="-122"/>
+                <a:cs typeface="Be Vietnam Pro" pitchFamily="34" charset="-120"/>
+              </a:rPr>
+              <a:t> cố</a:t>
+            </a:r>
+            <a:r>
+              <a:rPr lang="en-US" sz="2250" dirty="0" spc="19" kern="0">
+                <a:solidFill>
+                  <a:srgbClr val="E4E1D8"/>
+                </a:solidFill>
+                <a:latin typeface="Be Vietnam Pro" pitchFamily="34" charset="0"/>
+                <a:ea typeface="Be Vietnam Pro" pitchFamily="34" charset="-122"/>
+                <a:cs typeface="Be Vietnam Pro" pitchFamily="34" charset="-120"/>
+              </a:rPr>
+              <a:t> định</a:t>
+            </a:r>
+            <a:endParaRPr lang="en-US" sz="2250" dirty="0"/>
+          </a:p>
+          <a:p>
+            <a:pPr algn="l" marL="285750" indent="-204151">
+              <a:lnSpc>
+                <a:spcPts val="3150"/>
+              </a:lnSpc>
+              <a:buSzPct val="100000"/>
+              <a:buFont typeface="Arial"/>
+              <a:buChar char="•"/>
+            </a:pPr>
+            <a:r>
               <a:rPr lang="en-US" sz="2250" dirty="0" spc="-16" kern="0">
                 <a:solidFill>
                   <a:srgbClr val="E4E1D8"/>
@@ -4059,7 +4152,7 @@
                 <a:ea typeface="Be Vietnam Pro" pitchFamily="34" charset="-122"/>
                 <a:cs typeface="Be Vietnam Pro" pitchFamily="34" charset="-120"/>
               </a:rPr>
-              <a:t> phần cách</a:t>
+              <a:t> cách</a:t>
             </a:r>
             <a:r>
               <a:rPr lang="en-US" sz="2250" dirty="0" spc="0" kern="0">
@@ -4084,7 +4177,7 @@
               <a:t> cận phỏng</a:t>
             </a:r>
             <a:r>
-              <a:rPr lang="en-US" sz="2250" dirty="0" spc="-13" kern="0">
+              <a:rPr lang="en-US" sz="2250" dirty="0" spc="-12" kern="0">
                 <a:solidFill>
                   <a:srgbClr val="E4E1D8"/>
                 </a:solidFill>
